--- a/docs/Thesis/slides/MedScope-AI-TFM.pptx
+++ b/docs/Thesis/slides/MedScope-AI-TFM.pptx
@@ -4,6 +4,9 @@
   <p:sldMasterIdLst>
     <p:sldMasterId id="2147483648" r:id="rId1"/>
   </p:sldMasterIdLst>
+  <p:notesMasterIdLst>
+    <p:notesMasterId r:id="rId14"/>
+  </p:notesMasterIdLst>
   <p:sldIdLst>
     <p:sldId id="256" r:id="rId2"/>
     <p:sldId id="257" r:id="rId3"/>
@@ -134,6 +137,5510 @@
 </p:presentation>
 </file>
 
+<file path=ppt/notesMasters/notesMaster1.xml><?xml version="1.0" encoding="utf-8"?>
+<p:notesMaster xmlns:a="http://schemas.openxmlformats.org/drawingml/2006/main" xmlns:r="http://schemas.openxmlformats.org/officeDocument/2006/relationships" xmlns:p="http://schemas.openxmlformats.org/presentationml/2006/main">
+  <p:cSld>
+    <p:bg>
+      <p:bgRef idx="1001">
+        <a:schemeClr val="bg1"/>
+      </p:bgRef>
+    </p:bg>
+    <p:spTree>
+      <p:nvGrpSpPr>
+        <p:cNvPr id="1" name=""/>
+        <p:cNvGrpSpPr/>
+        <p:nvPr/>
+      </p:nvGrpSpPr>
+      <p:grpSpPr>
+        <a:xfrm>
+          <a:off x="0" y="0"/>
+          <a:ext cx="0" cy="0"/>
+          <a:chOff x="0" y="0"/>
+          <a:chExt cx="0" cy="0"/>
+        </a:xfrm>
+      </p:grpSpPr>
+      <p:sp>
+        <p:nvSpPr>
+          <p:cNvPr id="2" name="Header Placeholder 1"/>
+          <p:cNvSpPr>
+            <a:spLocks noGrp="1"/>
+          </p:cNvSpPr>
+          <p:nvPr>
+            <p:ph type="hdr" sz="quarter"/>
+          </p:nvPr>
+        </p:nvSpPr>
+        <p:spPr>
+          <a:xfrm>
+            <a:off x="0" y="0"/>
+            <a:ext cx="2971800" cy="458788"/>
+          </a:xfrm>
+          <a:prstGeom prst="rect">
+            <a:avLst/>
+          </a:prstGeom>
+        </p:spPr>
+        <p:txBody>
+          <a:bodyPr vert="horz" lIns="91440" tIns="45720" rIns="91440" bIns="45720" rtlCol="0"/>
+          <a:lstStyle>
+            <a:lvl1pPr algn="l">
+              <a:defRPr sz="1200"/>
+            </a:lvl1pPr>
+          </a:lstStyle>
+          <a:p>
+            <a:endParaRPr lang="en-US"/>
+          </a:p>
+        </p:txBody>
+      </p:sp>
+      <p:sp>
+        <p:nvSpPr>
+          <p:cNvPr id="3" name="Date Placeholder 2"/>
+          <p:cNvSpPr>
+            <a:spLocks noGrp="1"/>
+          </p:cNvSpPr>
+          <p:nvPr>
+            <p:ph type="dt" idx="1"/>
+          </p:nvPr>
+        </p:nvSpPr>
+        <p:spPr>
+          <a:xfrm>
+            <a:off x="3884613" y="0"/>
+            <a:ext cx="2971800" cy="458788"/>
+          </a:xfrm>
+          <a:prstGeom prst="rect">
+            <a:avLst/>
+          </a:prstGeom>
+        </p:spPr>
+        <p:txBody>
+          <a:bodyPr vert="horz" lIns="91440" tIns="45720" rIns="91440" bIns="45720" rtlCol="0"/>
+          <a:lstStyle>
+            <a:lvl1pPr algn="r">
+              <a:defRPr sz="1200"/>
+            </a:lvl1pPr>
+          </a:lstStyle>
+          <a:p>
+            <a:fld id="{F12CDEBF-7478-4584-97F5-217DD9F50D04}" type="datetimeFigureOut">
+              <a:rPr lang="en-US" smtClean="0"/>
+              <a:t>7/8/2026</a:t>
+            </a:fld>
+            <a:endParaRPr lang="en-US"/>
+          </a:p>
+        </p:txBody>
+      </p:sp>
+      <p:sp>
+        <p:nvSpPr>
+          <p:cNvPr id="4" name="Slide Image Placeholder 3"/>
+          <p:cNvSpPr>
+            <a:spLocks noGrp="1" noRot="1" noChangeAspect="1"/>
+          </p:cNvSpPr>
+          <p:nvPr>
+            <p:ph type="sldImg" idx="2"/>
+          </p:nvPr>
+        </p:nvSpPr>
+        <p:spPr>
+          <a:xfrm>
+            <a:off x="685800" y="1143000"/>
+            <a:ext cx="5486400" cy="3086100"/>
+          </a:xfrm>
+          <a:prstGeom prst="rect">
+            <a:avLst/>
+          </a:prstGeom>
+          <a:noFill/>
+          <a:ln w="12700">
+            <a:solidFill>
+              <a:prstClr val="black"/>
+            </a:solidFill>
+          </a:ln>
+        </p:spPr>
+        <p:txBody>
+          <a:bodyPr vert="horz" lIns="91440" tIns="45720" rIns="91440" bIns="45720" rtlCol="0" anchor="ctr"/>
+          <a:lstStyle/>
+          <a:p>
+            <a:endParaRPr lang="en-US"/>
+          </a:p>
+        </p:txBody>
+      </p:sp>
+      <p:sp>
+        <p:nvSpPr>
+          <p:cNvPr id="5" name="Notes Placeholder 4"/>
+          <p:cNvSpPr>
+            <a:spLocks noGrp="1"/>
+          </p:cNvSpPr>
+          <p:nvPr>
+            <p:ph type="body" sz="quarter" idx="3"/>
+          </p:nvPr>
+        </p:nvSpPr>
+        <p:spPr>
+          <a:xfrm>
+            <a:off x="685800" y="4400550"/>
+            <a:ext cx="5486400" cy="3600450"/>
+          </a:xfrm>
+          <a:prstGeom prst="rect">
+            <a:avLst/>
+          </a:prstGeom>
+        </p:spPr>
+        <p:txBody>
+          <a:bodyPr vert="horz" lIns="91440" tIns="45720" rIns="91440" bIns="45720" rtlCol="0"/>
+          <a:lstStyle/>
+          <a:p>
+            <a:pPr lvl="0"/>
+            <a:r>
+              <a:rPr lang="en-US"/>
+              <a:t>Click to edit Master text styles</a:t>
+            </a:r>
+          </a:p>
+          <a:p>
+            <a:pPr lvl="1"/>
+            <a:r>
+              <a:rPr lang="en-US"/>
+              <a:t>Second level</a:t>
+            </a:r>
+          </a:p>
+          <a:p>
+            <a:pPr lvl="2"/>
+            <a:r>
+              <a:rPr lang="en-US"/>
+              <a:t>Third level</a:t>
+            </a:r>
+          </a:p>
+          <a:p>
+            <a:pPr lvl="3"/>
+            <a:r>
+              <a:rPr lang="en-US"/>
+              <a:t>Fourth level</a:t>
+            </a:r>
+          </a:p>
+          <a:p>
+            <a:pPr lvl="4"/>
+            <a:r>
+              <a:rPr lang="en-US"/>
+              <a:t>Fifth level</a:t>
+            </a:r>
+          </a:p>
+        </p:txBody>
+      </p:sp>
+      <p:sp>
+        <p:nvSpPr>
+          <p:cNvPr id="6" name="Footer Placeholder 5"/>
+          <p:cNvSpPr>
+            <a:spLocks noGrp="1"/>
+          </p:cNvSpPr>
+          <p:nvPr>
+            <p:ph type="ftr" sz="quarter" idx="4"/>
+          </p:nvPr>
+        </p:nvSpPr>
+        <p:spPr>
+          <a:xfrm>
+            <a:off x="0" y="8685213"/>
+            <a:ext cx="2971800" cy="458787"/>
+          </a:xfrm>
+          <a:prstGeom prst="rect">
+            <a:avLst/>
+          </a:prstGeom>
+        </p:spPr>
+        <p:txBody>
+          <a:bodyPr vert="horz" lIns="91440" tIns="45720" rIns="91440" bIns="45720" rtlCol="0" anchor="b"/>
+          <a:lstStyle>
+            <a:lvl1pPr algn="l">
+              <a:defRPr sz="1200"/>
+            </a:lvl1pPr>
+          </a:lstStyle>
+          <a:p>
+            <a:endParaRPr lang="en-US"/>
+          </a:p>
+        </p:txBody>
+      </p:sp>
+      <p:sp>
+        <p:nvSpPr>
+          <p:cNvPr id="7" name="Slide Number Placeholder 6"/>
+          <p:cNvSpPr>
+            <a:spLocks noGrp="1"/>
+          </p:cNvSpPr>
+          <p:nvPr>
+            <p:ph type="sldNum" sz="quarter" idx="5"/>
+          </p:nvPr>
+        </p:nvSpPr>
+        <p:spPr>
+          <a:xfrm>
+            <a:off x="3884613" y="8685213"/>
+            <a:ext cx="2971800" cy="458787"/>
+          </a:xfrm>
+          <a:prstGeom prst="rect">
+            <a:avLst/>
+          </a:prstGeom>
+        </p:spPr>
+        <p:txBody>
+          <a:bodyPr vert="horz" lIns="91440" tIns="45720" rIns="91440" bIns="45720" rtlCol="0" anchor="b"/>
+          <a:lstStyle>
+            <a:lvl1pPr algn="r">
+              <a:defRPr sz="1200"/>
+            </a:lvl1pPr>
+          </a:lstStyle>
+          <a:p>
+            <a:fld id="{12BC5CD0-964A-412E-BAD3-D4ECB486B5E6}" type="slidenum">
+              <a:rPr lang="en-US" smtClean="0"/>
+              <a:t>‹#›</a:t>
+            </a:fld>
+            <a:endParaRPr lang="en-US"/>
+          </a:p>
+        </p:txBody>
+      </p:sp>
+    </p:spTree>
+    <p:extLst>
+      <p:ext uri="{BB962C8B-B14F-4D97-AF65-F5344CB8AC3E}">
+        <p14:creationId xmlns:p14="http://schemas.microsoft.com/office/powerpoint/2010/main" val="3462263479"/>
+      </p:ext>
+    </p:extLst>
+  </p:cSld>
+  <p:clrMap bg1="lt1" tx1="dk1" bg2="lt2" tx2="dk2" accent1="accent1" accent2="accent2" accent3="accent3" accent4="accent4" accent5="accent5" accent6="accent6" hlink="hlink" folHlink="folHlink"/>
+  <p:notesStyle>
+    <a:lvl1pPr marL="0" algn="l" defTabSz="914400" rtl="0" eaLnBrk="1" latinLnBrk="0" hangingPunct="1">
+      <a:defRPr sz="1200" kern="1200">
+        <a:solidFill>
+          <a:schemeClr val="tx1"/>
+        </a:solidFill>
+        <a:latin typeface="+mn-lt"/>
+        <a:ea typeface="+mn-ea"/>
+        <a:cs typeface="+mn-cs"/>
+      </a:defRPr>
+    </a:lvl1pPr>
+    <a:lvl2pPr marL="457200" algn="l" defTabSz="914400" rtl="0" eaLnBrk="1" latinLnBrk="0" hangingPunct="1">
+      <a:defRPr sz="1200" kern="1200">
+        <a:solidFill>
+          <a:schemeClr val="tx1"/>
+        </a:solidFill>
+        <a:latin typeface="+mn-lt"/>
+        <a:ea typeface="+mn-ea"/>
+        <a:cs typeface="+mn-cs"/>
+      </a:defRPr>
+    </a:lvl2pPr>
+    <a:lvl3pPr marL="914400" algn="l" defTabSz="914400" rtl="0" eaLnBrk="1" latinLnBrk="0" hangingPunct="1">
+      <a:defRPr sz="1200" kern="1200">
+        <a:solidFill>
+          <a:schemeClr val="tx1"/>
+        </a:solidFill>
+        <a:latin typeface="+mn-lt"/>
+        <a:ea typeface="+mn-ea"/>
+        <a:cs typeface="+mn-cs"/>
+      </a:defRPr>
+    </a:lvl3pPr>
+    <a:lvl4pPr marL="1371600" algn="l" defTabSz="914400" rtl="0" eaLnBrk="1" latinLnBrk="0" hangingPunct="1">
+      <a:defRPr sz="1200" kern="1200">
+        <a:solidFill>
+          <a:schemeClr val="tx1"/>
+        </a:solidFill>
+        <a:latin typeface="+mn-lt"/>
+        <a:ea typeface="+mn-ea"/>
+        <a:cs typeface="+mn-cs"/>
+      </a:defRPr>
+    </a:lvl4pPr>
+    <a:lvl5pPr marL="1828800" algn="l" defTabSz="914400" rtl="0" eaLnBrk="1" latinLnBrk="0" hangingPunct="1">
+      <a:defRPr sz="1200" kern="1200">
+        <a:solidFill>
+          <a:schemeClr val="tx1"/>
+        </a:solidFill>
+        <a:latin typeface="+mn-lt"/>
+        <a:ea typeface="+mn-ea"/>
+        <a:cs typeface="+mn-cs"/>
+      </a:defRPr>
+    </a:lvl5pPr>
+    <a:lvl6pPr marL="2286000" algn="l" defTabSz="914400" rtl="0" eaLnBrk="1" latinLnBrk="0" hangingPunct="1">
+      <a:defRPr sz="1200" kern="1200">
+        <a:solidFill>
+          <a:schemeClr val="tx1"/>
+        </a:solidFill>
+        <a:latin typeface="+mn-lt"/>
+        <a:ea typeface="+mn-ea"/>
+        <a:cs typeface="+mn-cs"/>
+      </a:defRPr>
+    </a:lvl6pPr>
+    <a:lvl7pPr marL="2743200" algn="l" defTabSz="914400" rtl="0" eaLnBrk="1" latinLnBrk="0" hangingPunct="1">
+      <a:defRPr sz="1200" kern="1200">
+        <a:solidFill>
+          <a:schemeClr val="tx1"/>
+        </a:solidFill>
+        <a:latin typeface="+mn-lt"/>
+        <a:ea typeface="+mn-ea"/>
+        <a:cs typeface="+mn-cs"/>
+      </a:defRPr>
+    </a:lvl7pPr>
+    <a:lvl8pPr marL="3200400" algn="l" defTabSz="914400" rtl="0" eaLnBrk="1" latinLnBrk="0" hangingPunct="1">
+      <a:defRPr sz="1200" kern="1200">
+        <a:solidFill>
+          <a:schemeClr val="tx1"/>
+        </a:solidFill>
+        <a:latin typeface="+mn-lt"/>
+        <a:ea typeface="+mn-ea"/>
+        <a:cs typeface="+mn-cs"/>
+      </a:defRPr>
+    </a:lvl8pPr>
+    <a:lvl9pPr marL="3657600" algn="l" defTabSz="914400" rtl="0" eaLnBrk="1" latinLnBrk="0" hangingPunct="1">
+      <a:defRPr sz="1200" kern="1200">
+        <a:solidFill>
+          <a:schemeClr val="tx1"/>
+        </a:solidFill>
+        <a:latin typeface="+mn-lt"/>
+        <a:ea typeface="+mn-ea"/>
+        <a:cs typeface="+mn-cs"/>
+      </a:defRPr>
+    </a:lvl9pPr>
+  </p:notesStyle>
+</p:notesMaster>
+</file>
+
+<file path=ppt/notesSlides/notesSlide1.xml><?xml version="1.0" encoding="utf-8"?>
+<p:notes xmlns:a="http://schemas.openxmlformats.org/drawingml/2006/main" xmlns:r="http://schemas.openxmlformats.org/officeDocument/2006/relationships" xmlns:p="http://schemas.openxmlformats.org/presentationml/2006/main">
+  <p:cSld>
+    <p:spTree>
+      <p:nvGrpSpPr>
+        <p:cNvPr id="1" name=""/>
+        <p:cNvGrpSpPr/>
+        <p:nvPr/>
+      </p:nvGrpSpPr>
+      <p:grpSpPr>
+        <a:xfrm>
+          <a:off x="0" y="0"/>
+          <a:ext cx="0" cy="0"/>
+          <a:chOff x="0" y="0"/>
+          <a:chExt cx="0" cy="0"/>
+        </a:xfrm>
+      </p:grpSpPr>
+      <p:sp>
+        <p:nvSpPr>
+          <p:cNvPr id="2" name="Slide Image Placeholder 1"/>
+          <p:cNvSpPr>
+            <a:spLocks noGrp="1" noRot="1" noChangeAspect="1"/>
+          </p:cNvSpPr>
+          <p:nvPr>
+            <p:ph type="sldImg"/>
+          </p:nvPr>
+        </p:nvSpPr>
+        <p:spPr/>
+      </p:sp>
+      <p:sp>
+        <p:nvSpPr>
+          <p:cNvPr id="3" name="Notes Placeholder 2"/>
+          <p:cNvSpPr>
+            <a:spLocks noGrp="1"/>
+          </p:cNvSpPr>
+          <p:nvPr>
+            <p:ph type="body" idx="1"/>
+          </p:nvPr>
+        </p:nvSpPr>
+        <p:spPr/>
+        <p:txBody>
+          <a:bodyPr/>
+          <a:lstStyle/>
+          <a:p>
+            <a:r>
+              <a:rPr lang="en-US" dirty="0"/>
+              <a:t>«Hola. Mi </a:t>
+            </a:r>
+            <a:r>
+              <a:rPr lang="en-US" dirty="0" err="1"/>
+              <a:t>nombre</a:t>
+            </a:r>
+            <a:r>
+              <a:rPr lang="en-US" dirty="0"/>
+              <a:t> es </a:t>
+            </a:r>
+            <a:r>
+              <a:rPr lang="en-US" b="1" dirty="0"/>
+              <a:t>Gastón Clara </a:t>
+            </a:r>
+            <a:r>
+              <a:rPr lang="en-US" dirty="0"/>
+              <a:t> y </a:t>
+            </a:r>
+            <a:r>
+              <a:rPr lang="en-US" dirty="0" err="1"/>
+              <a:t>os</a:t>
+            </a:r>
+            <a:r>
+              <a:rPr lang="en-US" dirty="0"/>
+              <a:t> </a:t>
+            </a:r>
+            <a:r>
+              <a:rPr lang="en-US" dirty="0" err="1"/>
+              <a:t>voi</a:t>
+            </a:r>
+            <a:r>
+              <a:rPr lang="en-US" dirty="0"/>
+              <a:t> a </a:t>
+            </a:r>
+            <a:r>
+              <a:rPr lang="en-US" dirty="0" err="1"/>
+              <a:t>presentar</a:t>
+            </a:r>
+            <a:r>
+              <a:rPr lang="en-US" dirty="0"/>
+              <a:t> mi </a:t>
+            </a:r>
+            <a:r>
+              <a:rPr lang="en-US" dirty="0" err="1"/>
+              <a:t>Trabajo</a:t>
+            </a:r>
+            <a:r>
+              <a:rPr lang="en-US" dirty="0"/>
+              <a:t> Final de </a:t>
+            </a:r>
+            <a:r>
+              <a:rPr lang="en-US" dirty="0" err="1"/>
+              <a:t>Máster</a:t>
+            </a:r>
+            <a:r>
+              <a:rPr lang="en-US" dirty="0"/>
+              <a:t>: </a:t>
+            </a:r>
+            <a:r>
+              <a:rPr lang="en-US" b="1" dirty="0" err="1"/>
+              <a:t>MedScope</a:t>
+            </a:r>
+            <a:r>
+              <a:rPr lang="en-US" b="1" dirty="0"/>
+              <a:t> AI.</a:t>
+            </a:r>
+          </a:p>
+          <a:p>
+            <a:endParaRPr lang="en-US" dirty="0"/>
+          </a:p>
+          <a:p>
+            <a:r>
+              <a:rPr lang="en-US" b="1" dirty="0" err="1"/>
+              <a:t>MedScope</a:t>
+            </a:r>
+            <a:r>
+              <a:rPr lang="en-US" b="1" dirty="0"/>
+              <a:t> AI es </a:t>
+            </a:r>
+            <a:r>
+              <a:rPr lang="en-US" dirty="0"/>
+              <a:t>un </a:t>
+            </a:r>
+            <a:r>
+              <a:rPr lang="en-US" dirty="0" err="1"/>
+              <a:t>sistema</a:t>
+            </a:r>
+            <a:r>
+              <a:rPr lang="en-US" dirty="0"/>
+              <a:t> de </a:t>
+            </a:r>
+            <a:r>
+              <a:rPr lang="en-US" dirty="0" err="1"/>
+              <a:t>apoyo</a:t>
+            </a:r>
+            <a:r>
+              <a:rPr lang="en-US" dirty="0"/>
+              <a:t> a la </a:t>
+            </a:r>
+            <a:r>
+              <a:rPr lang="en-US" dirty="0" err="1"/>
+              <a:t>decisión</a:t>
+            </a:r>
+            <a:r>
+              <a:rPr lang="en-US" dirty="0"/>
+              <a:t> </a:t>
+            </a:r>
+            <a:r>
+              <a:rPr lang="en-US" dirty="0" err="1"/>
+              <a:t>clínica</a:t>
+            </a:r>
+            <a:r>
+              <a:rPr lang="en-US" dirty="0"/>
+              <a:t> </a:t>
+            </a:r>
+            <a:r>
+              <a:rPr lang="en-US" dirty="0" err="1"/>
+              <a:t>basado</a:t>
+            </a:r>
+            <a:r>
+              <a:rPr lang="en-US" dirty="0"/>
+              <a:t> </a:t>
+            </a:r>
+            <a:r>
+              <a:rPr lang="en-US" dirty="0" err="1"/>
+              <a:t>en</a:t>
+            </a:r>
+            <a:r>
+              <a:rPr lang="en-US" dirty="0"/>
+              <a:t> </a:t>
+            </a:r>
+            <a:r>
+              <a:rPr lang="en-US" dirty="0" err="1"/>
+              <a:t>inteligencia</a:t>
+            </a:r>
+            <a:r>
+              <a:rPr lang="en-US" dirty="0"/>
+              <a:t> artificial explicable.</a:t>
+            </a:r>
+          </a:p>
+          <a:p>
+            <a:endParaRPr lang="en-US" dirty="0"/>
+          </a:p>
+          <a:p>
+            <a:r>
+              <a:rPr lang="en-US" dirty="0"/>
+              <a:t>En </a:t>
+            </a:r>
+            <a:r>
+              <a:rPr lang="en-US" dirty="0" err="1"/>
+              <a:t>los</a:t>
+            </a:r>
+            <a:r>
+              <a:rPr lang="en-US" dirty="0"/>
+              <a:t> </a:t>
+            </a:r>
+            <a:r>
+              <a:rPr lang="en-US" dirty="0" err="1"/>
+              <a:t>próximos</a:t>
+            </a:r>
+            <a:r>
+              <a:rPr lang="en-US" dirty="0"/>
+              <a:t> </a:t>
+            </a:r>
+            <a:r>
+              <a:rPr lang="en-US" dirty="0" err="1"/>
+              <a:t>minutos</a:t>
+            </a:r>
+            <a:r>
+              <a:rPr lang="en-US" dirty="0"/>
+              <a:t> </a:t>
+            </a:r>
+            <a:r>
+              <a:rPr lang="en-US" dirty="0" err="1"/>
+              <a:t>voy</a:t>
+            </a:r>
+            <a:r>
+              <a:rPr lang="en-US" dirty="0"/>
+              <a:t> a </a:t>
+            </a:r>
+            <a:r>
+              <a:rPr lang="en-US" dirty="0" err="1"/>
+              <a:t>explicar</a:t>
+            </a:r>
+            <a:r>
+              <a:rPr lang="en-US" dirty="0"/>
+              <a:t> </a:t>
+            </a:r>
+            <a:r>
+              <a:rPr lang="en-US" dirty="0" err="1"/>
+              <a:t>el</a:t>
+            </a:r>
+            <a:r>
+              <a:rPr lang="en-US" dirty="0"/>
+              <a:t> </a:t>
+            </a:r>
+            <a:r>
+              <a:rPr lang="en-US" dirty="0" err="1"/>
+              <a:t>problema</a:t>
+            </a:r>
+            <a:r>
+              <a:rPr lang="en-US" dirty="0"/>
+              <a:t> </a:t>
+            </a:r>
+            <a:r>
+              <a:rPr lang="en-US" dirty="0" err="1"/>
+              <a:t>que</a:t>
+            </a:r>
+            <a:r>
+              <a:rPr lang="en-US" dirty="0"/>
+              <a:t> </a:t>
+            </a:r>
+            <a:r>
+              <a:rPr lang="en-US" dirty="0" err="1"/>
+              <a:t>aborda</a:t>
+            </a:r>
+            <a:r>
+              <a:rPr lang="en-US" dirty="0"/>
+              <a:t> </a:t>
+            </a:r>
+            <a:r>
+              <a:rPr lang="en-US" dirty="0" err="1"/>
+              <a:t>el</a:t>
+            </a:r>
+            <a:r>
+              <a:rPr lang="en-US" dirty="0"/>
+              <a:t> </a:t>
+            </a:r>
+            <a:r>
+              <a:rPr lang="en-US" dirty="0" err="1"/>
+              <a:t>proyecto</a:t>
+            </a:r>
+            <a:r>
+              <a:rPr lang="en-US" dirty="0"/>
+              <a:t>, la </a:t>
+            </a:r>
+            <a:r>
+              <a:rPr lang="en-US" dirty="0" err="1"/>
+              <a:t>arquitectura</a:t>
+            </a:r>
+            <a:r>
+              <a:rPr lang="en-US" dirty="0"/>
+              <a:t> </a:t>
+            </a:r>
+            <a:r>
+              <a:rPr lang="en-US" dirty="0" err="1"/>
+              <a:t>técnica</a:t>
+            </a:r>
+            <a:r>
+              <a:rPr lang="en-US" dirty="0"/>
+              <a:t>, </a:t>
+            </a:r>
+            <a:r>
+              <a:rPr lang="en-US" dirty="0" err="1"/>
+              <a:t>los</a:t>
+            </a:r>
+            <a:r>
+              <a:rPr lang="en-US" dirty="0"/>
+              <a:t> </a:t>
+            </a:r>
+            <a:r>
+              <a:rPr lang="en-US" dirty="0" err="1"/>
+              <a:t>resultados</a:t>
+            </a:r>
+            <a:r>
+              <a:rPr lang="en-US" dirty="0"/>
+              <a:t> del </a:t>
+            </a:r>
+            <a:r>
+              <a:rPr lang="en-US" dirty="0" err="1"/>
+              <a:t>modelo</a:t>
+            </a:r>
+            <a:r>
+              <a:rPr lang="en-US" dirty="0"/>
+              <a:t> de machine learning, y — lo </a:t>
+            </a:r>
+            <a:r>
+              <a:rPr lang="en-US" dirty="0" err="1"/>
+              <a:t>más</a:t>
+            </a:r>
+            <a:r>
+              <a:rPr lang="en-US" dirty="0"/>
+              <a:t> </a:t>
+            </a:r>
+            <a:r>
+              <a:rPr lang="en-US" dirty="0" err="1"/>
+              <a:t>importante</a:t>
+            </a:r>
+            <a:r>
+              <a:rPr lang="en-US" dirty="0"/>
+              <a:t> — </a:t>
+            </a:r>
+            <a:r>
+              <a:rPr lang="en-US" dirty="0" err="1"/>
+              <a:t>una</a:t>
+            </a:r>
+            <a:r>
+              <a:rPr lang="en-US" dirty="0"/>
+              <a:t> </a:t>
+            </a:r>
+            <a:r>
+              <a:rPr lang="en-US" b="1" dirty="0" err="1"/>
+              <a:t>demostración</a:t>
+            </a:r>
+            <a:r>
+              <a:rPr lang="en-US" b="1" dirty="0"/>
+              <a:t> </a:t>
+            </a:r>
+            <a:r>
+              <a:rPr lang="en-US" b="1" dirty="0" err="1"/>
+              <a:t>en</a:t>
+            </a:r>
+            <a:r>
+              <a:rPr lang="en-US" b="1" dirty="0"/>
+              <a:t> vivo</a:t>
+            </a:r>
+            <a:r>
+              <a:rPr lang="en-US" dirty="0"/>
+              <a:t> de la </a:t>
+            </a:r>
+            <a:r>
+              <a:rPr lang="en-US" dirty="0" err="1"/>
+              <a:t>plataforma</a:t>
+            </a:r>
+            <a:r>
+              <a:rPr lang="en-US" dirty="0"/>
+              <a:t> </a:t>
+            </a:r>
+            <a:r>
+              <a:rPr lang="en-US" dirty="0" err="1"/>
+              <a:t>desplegada</a:t>
+            </a:r>
+            <a:r>
+              <a:rPr lang="en-US" dirty="0"/>
+              <a:t> </a:t>
+            </a:r>
+            <a:r>
+              <a:rPr lang="en-US" dirty="0" err="1"/>
+              <a:t>en</a:t>
+            </a:r>
+            <a:r>
+              <a:rPr lang="en-US" dirty="0"/>
+              <a:t> la </a:t>
+            </a:r>
+            <a:r>
+              <a:rPr lang="en-US" dirty="0" err="1"/>
+              <a:t>nube</a:t>
+            </a:r>
+            <a:r>
+              <a:rPr lang="en-US" dirty="0"/>
+              <a:t>.</a:t>
+            </a:r>
+          </a:p>
+          <a:p>
+            <a:endParaRPr lang="en-US" dirty="0"/>
+          </a:p>
+          <a:p>
+            <a:r>
+              <a:rPr lang="en-US" dirty="0"/>
+              <a:t>Antes de </a:t>
+            </a:r>
+            <a:r>
+              <a:rPr lang="en-US" dirty="0" err="1"/>
+              <a:t>empezar</a:t>
+            </a:r>
+            <a:r>
+              <a:rPr lang="en-US" dirty="0"/>
+              <a:t>, </a:t>
+            </a:r>
+            <a:r>
+              <a:rPr lang="en-US" dirty="0" err="1"/>
+              <a:t>una</a:t>
+            </a:r>
+            <a:r>
+              <a:rPr lang="en-US" dirty="0"/>
+              <a:t> </a:t>
+            </a:r>
+            <a:r>
+              <a:rPr lang="en-US" dirty="0" err="1"/>
+              <a:t>aclaración</a:t>
+            </a:r>
+            <a:r>
+              <a:rPr lang="en-US" dirty="0"/>
+              <a:t> </a:t>
+            </a:r>
+            <a:r>
+              <a:rPr lang="en-US" dirty="0" err="1"/>
+              <a:t>importante</a:t>
+            </a:r>
+            <a:r>
+              <a:rPr lang="en-US" dirty="0"/>
+              <a:t>: </a:t>
+            </a:r>
+            <a:r>
+              <a:rPr lang="en-US" dirty="0" err="1"/>
+              <a:t>MedScope</a:t>
+            </a:r>
+            <a:r>
+              <a:rPr lang="en-US" dirty="0"/>
+              <a:t> AI </a:t>
+            </a:r>
+            <a:r>
+              <a:rPr lang="en-US" b="1" dirty="0"/>
+              <a:t>no </a:t>
+            </a:r>
+            <a:r>
+              <a:rPr lang="en-US" b="1" dirty="0" err="1"/>
+              <a:t>diagnostica</a:t>
+            </a:r>
+            <a:r>
+              <a:rPr lang="en-US" dirty="0"/>
+              <a:t> </a:t>
+            </a:r>
+            <a:r>
+              <a:rPr lang="en-US" dirty="0" err="1"/>
+              <a:t>ni</a:t>
+            </a:r>
+            <a:r>
+              <a:rPr lang="en-US" dirty="0"/>
+              <a:t> prescribe </a:t>
+            </a:r>
+            <a:r>
+              <a:rPr lang="en-US" dirty="0" err="1"/>
+              <a:t>tratamientos</a:t>
+            </a:r>
+            <a:r>
+              <a:rPr lang="en-US" dirty="0"/>
+              <a:t>. Es </a:t>
+            </a:r>
+            <a:r>
+              <a:rPr lang="en-US" dirty="0" err="1"/>
+              <a:t>una</a:t>
+            </a:r>
+            <a:r>
+              <a:rPr lang="en-US" dirty="0"/>
+              <a:t> </a:t>
+            </a:r>
+            <a:r>
+              <a:rPr lang="en-US" dirty="0" err="1"/>
+              <a:t>herramienta</a:t>
+            </a:r>
+            <a:r>
+              <a:rPr lang="en-US" dirty="0"/>
+              <a:t> de </a:t>
+            </a:r>
+            <a:r>
+              <a:rPr lang="en-US" b="1" dirty="0" err="1"/>
+              <a:t>apoyo</a:t>
+            </a:r>
+            <a:r>
+              <a:rPr lang="en-US" b="1" dirty="0"/>
+              <a:t> a la </a:t>
+            </a:r>
+            <a:r>
+              <a:rPr lang="en-US" b="1" dirty="0" err="1"/>
+              <a:t>decisión</a:t>
+            </a:r>
+            <a:r>
+              <a:rPr lang="en-US" dirty="0"/>
+              <a:t> para </a:t>
+            </a:r>
+            <a:r>
+              <a:rPr lang="en-US" dirty="0" err="1"/>
+              <a:t>ayudar</a:t>
+            </a:r>
+            <a:r>
+              <a:rPr lang="en-US" dirty="0"/>
+              <a:t> a </a:t>
+            </a:r>
+            <a:r>
+              <a:rPr lang="en-US" dirty="0" err="1"/>
+              <a:t>equipos</a:t>
+            </a:r>
+            <a:r>
+              <a:rPr lang="en-US" dirty="0"/>
+              <a:t> </a:t>
+            </a:r>
+            <a:r>
+              <a:rPr lang="en-US" dirty="0" err="1"/>
+              <a:t>clínicos</a:t>
+            </a:r>
+            <a:r>
+              <a:rPr lang="en-US" dirty="0"/>
+              <a:t> a </a:t>
+            </a:r>
+            <a:r>
+              <a:rPr lang="en-US" dirty="0" err="1"/>
+              <a:t>anticipar</a:t>
+            </a:r>
+            <a:r>
+              <a:rPr lang="en-US" dirty="0"/>
+              <a:t> </a:t>
+            </a:r>
+            <a:r>
+              <a:rPr lang="en-US" dirty="0" err="1"/>
+              <a:t>el</a:t>
+            </a:r>
+            <a:r>
+              <a:rPr lang="en-US" dirty="0"/>
+              <a:t> </a:t>
+            </a:r>
+            <a:r>
+              <a:rPr lang="en-US" dirty="0" err="1"/>
+              <a:t>riesgo</a:t>
+            </a:r>
+            <a:r>
+              <a:rPr lang="en-US" dirty="0"/>
+              <a:t> de </a:t>
+            </a:r>
+            <a:r>
+              <a:rPr lang="en-US" dirty="0" err="1"/>
+              <a:t>readmisión</a:t>
+            </a:r>
+            <a:r>
+              <a:rPr lang="en-US" dirty="0"/>
+              <a:t> </a:t>
+            </a:r>
+            <a:r>
+              <a:rPr lang="en-US" dirty="0" err="1"/>
+              <a:t>hospitalaria</a:t>
+            </a:r>
+            <a:r>
+              <a:rPr lang="en-US" dirty="0"/>
+              <a:t>.»</a:t>
+            </a:r>
+          </a:p>
+          <a:p>
+            <a:endParaRPr lang="en-US" dirty="0"/>
+          </a:p>
+        </p:txBody>
+      </p:sp>
+      <p:sp>
+        <p:nvSpPr>
+          <p:cNvPr id="4" name="Slide Number Placeholder 3"/>
+          <p:cNvSpPr>
+            <a:spLocks noGrp="1"/>
+          </p:cNvSpPr>
+          <p:nvPr>
+            <p:ph type="sldNum" sz="quarter" idx="5"/>
+          </p:nvPr>
+        </p:nvSpPr>
+        <p:spPr/>
+        <p:txBody>
+          <a:bodyPr/>
+          <a:lstStyle/>
+          <a:p>
+            <a:fld id="{12BC5CD0-964A-412E-BAD3-D4ECB486B5E6}" type="slidenum">
+              <a:rPr lang="en-US" smtClean="0"/>
+              <a:t>1</a:t>
+            </a:fld>
+            <a:endParaRPr lang="en-US"/>
+          </a:p>
+        </p:txBody>
+      </p:sp>
+    </p:spTree>
+    <p:extLst>
+      <p:ext uri="{BB962C8B-B14F-4D97-AF65-F5344CB8AC3E}">
+        <p14:creationId xmlns:p14="http://schemas.microsoft.com/office/powerpoint/2010/main" val="3987411450"/>
+      </p:ext>
+    </p:extLst>
+  </p:cSld>
+  <p:clrMapOvr>
+    <a:masterClrMapping/>
+  </p:clrMapOvr>
+</p:notes>
+</file>
+
+<file path=ppt/notesSlides/notesSlide10.xml><?xml version="1.0" encoding="utf-8"?>
+<p:notes xmlns:a="http://schemas.openxmlformats.org/drawingml/2006/main" xmlns:r="http://schemas.openxmlformats.org/officeDocument/2006/relationships" xmlns:p="http://schemas.openxmlformats.org/presentationml/2006/main">
+  <p:cSld>
+    <p:spTree>
+      <p:nvGrpSpPr>
+        <p:cNvPr id="1" name=""/>
+        <p:cNvGrpSpPr/>
+        <p:nvPr/>
+      </p:nvGrpSpPr>
+      <p:grpSpPr>
+        <a:xfrm>
+          <a:off x="0" y="0"/>
+          <a:ext cx="0" cy="0"/>
+          <a:chOff x="0" y="0"/>
+          <a:chExt cx="0" cy="0"/>
+        </a:xfrm>
+      </p:grpSpPr>
+      <p:sp>
+        <p:nvSpPr>
+          <p:cNvPr id="2" name="Slide Image Placeholder 1"/>
+          <p:cNvSpPr>
+            <a:spLocks noGrp="1" noRot="1" noChangeAspect="1"/>
+          </p:cNvSpPr>
+          <p:nvPr>
+            <p:ph type="sldImg"/>
+          </p:nvPr>
+        </p:nvSpPr>
+        <p:spPr/>
+      </p:sp>
+      <p:sp>
+        <p:nvSpPr>
+          <p:cNvPr id="3" name="Notes Placeholder 2"/>
+          <p:cNvSpPr>
+            <a:spLocks noGrp="1"/>
+          </p:cNvSpPr>
+          <p:nvPr>
+            <p:ph type="body" idx="1"/>
+          </p:nvPr>
+        </p:nvSpPr>
+        <p:spPr/>
+        <p:txBody>
+          <a:bodyPr/>
+          <a:lstStyle/>
+          <a:p>
+            <a:r>
+              <a:rPr lang="en-US" dirty="0"/>
+              <a:t>«Más </a:t>
+            </a:r>
+            <a:r>
+              <a:rPr lang="en-US" dirty="0" err="1"/>
+              <a:t>allá</a:t>
+            </a:r>
+            <a:r>
+              <a:rPr lang="en-US" dirty="0"/>
+              <a:t> del </a:t>
+            </a:r>
+            <a:r>
+              <a:rPr lang="en-US" dirty="0" err="1"/>
+              <a:t>modelo</a:t>
+            </a:r>
+            <a:r>
+              <a:rPr lang="en-US" dirty="0"/>
+              <a:t>, </a:t>
+            </a:r>
+            <a:r>
+              <a:rPr lang="en-US" dirty="0" err="1"/>
+              <a:t>el</a:t>
+            </a:r>
+            <a:r>
+              <a:rPr lang="en-US" dirty="0"/>
+              <a:t> </a:t>
+            </a:r>
+            <a:r>
+              <a:rPr lang="en-US" dirty="0" err="1"/>
+              <a:t>proyecto</a:t>
+            </a:r>
+            <a:r>
+              <a:rPr lang="en-US" dirty="0"/>
+              <a:t> </a:t>
+            </a:r>
+            <a:r>
+              <a:rPr lang="en-US" dirty="0" err="1"/>
+              <a:t>demuestra</a:t>
+            </a:r>
+            <a:r>
+              <a:rPr lang="en-US" dirty="0"/>
+              <a:t> </a:t>
+            </a:r>
+            <a:r>
+              <a:rPr lang="en-US" b="1" dirty="0" err="1"/>
+              <a:t>ingeniería</a:t>
+            </a:r>
+            <a:r>
+              <a:rPr lang="en-US" b="1" dirty="0"/>
+              <a:t> de software</a:t>
+            </a:r>
+            <a:r>
+              <a:rPr lang="en-US" dirty="0"/>
+              <a:t>: </a:t>
+            </a:r>
+            <a:r>
+              <a:rPr lang="en-US" dirty="0" err="1"/>
+              <a:t>más</a:t>
+            </a:r>
+            <a:r>
+              <a:rPr lang="en-US" dirty="0"/>
+              <a:t> de </a:t>
+            </a:r>
+            <a:r>
+              <a:rPr lang="en-US" dirty="0" err="1"/>
+              <a:t>doscientos</a:t>
+            </a:r>
+            <a:r>
+              <a:rPr lang="en-US" dirty="0"/>
+              <a:t> quince tests </a:t>
+            </a:r>
+            <a:r>
+              <a:rPr lang="en-US" dirty="0" err="1"/>
+              <a:t>automatizados</a:t>
+            </a:r>
+            <a:r>
+              <a:rPr lang="en-US" dirty="0"/>
+              <a:t> </a:t>
+            </a:r>
+            <a:r>
+              <a:rPr lang="en-US" dirty="0" err="1"/>
+              <a:t>en</a:t>
+            </a:r>
+            <a:r>
+              <a:rPr lang="en-US" dirty="0"/>
+              <a:t> backend, tests de machine learning, tests end-to-end con Playwright </a:t>
+            </a:r>
+            <a:r>
+              <a:rPr lang="en-US" dirty="0" err="1"/>
+              <a:t>que</a:t>
+            </a:r>
+            <a:r>
+              <a:rPr lang="en-US" dirty="0"/>
+              <a:t> </a:t>
+            </a:r>
+            <a:r>
+              <a:rPr lang="en-US" dirty="0" err="1"/>
+              <a:t>recorren</a:t>
+            </a:r>
+            <a:r>
+              <a:rPr lang="en-US" dirty="0"/>
+              <a:t> </a:t>
+            </a:r>
+            <a:r>
+              <a:rPr lang="en-US" dirty="0" err="1"/>
+              <a:t>el</a:t>
+            </a:r>
+            <a:r>
+              <a:rPr lang="en-US" dirty="0"/>
+              <a:t> </a:t>
+            </a:r>
+            <a:r>
+              <a:rPr lang="en-US" dirty="0" err="1"/>
+              <a:t>flujo</a:t>
+            </a:r>
+            <a:r>
+              <a:rPr lang="en-US" dirty="0"/>
+              <a:t> </a:t>
+            </a:r>
+            <a:r>
+              <a:rPr lang="en-US" dirty="0" err="1"/>
+              <a:t>que</a:t>
+            </a:r>
+            <a:r>
+              <a:rPr lang="en-US" dirty="0"/>
+              <a:t> </a:t>
+            </a:r>
+            <a:r>
+              <a:rPr lang="en-US" dirty="0" err="1"/>
+              <a:t>acaban</a:t>
+            </a:r>
+            <a:r>
+              <a:rPr lang="en-US" dirty="0"/>
+              <a:t> de </a:t>
+            </a:r>
+            <a:r>
+              <a:rPr lang="en-US" dirty="0" err="1"/>
+              <a:t>ver</a:t>
+            </a:r>
+            <a:r>
+              <a:rPr lang="en-US" dirty="0"/>
+              <a:t>, </a:t>
+            </a:r>
+            <a:r>
+              <a:rPr lang="en-US" dirty="0" err="1"/>
+              <a:t>integración</a:t>
+            </a:r>
+            <a:r>
+              <a:rPr lang="en-US" dirty="0"/>
+              <a:t> continua </a:t>
+            </a:r>
+            <a:r>
+              <a:rPr lang="en-US" dirty="0" err="1"/>
+              <a:t>en</a:t>
+            </a:r>
+            <a:r>
+              <a:rPr lang="en-US" dirty="0"/>
+              <a:t> GitHub Actions, y </a:t>
+            </a:r>
+            <a:r>
+              <a:rPr lang="en-US" dirty="0" err="1"/>
+              <a:t>despliegue</a:t>
+            </a:r>
+            <a:r>
+              <a:rPr lang="en-US" dirty="0"/>
+              <a:t> </a:t>
+            </a:r>
+            <a:r>
+              <a:rPr lang="en-US" dirty="0" err="1"/>
+              <a:t>automático</a:t>
+            </a:r>
+            <a:r>
+              <a:rPr lang="en-US" dirty="0"/>
+              <a:t> al </a:t>
+            </a:r>
+            <a:r>
+              <a:rPr lang="en-US" dirty="0" err="1"/>
+              <a:t>hacer</a:t>
+            </a:r>
+            <a:r>
+              <a:rPr lang="en-US" dirty="0"/>
+              <a:t> push a la </a:t>
+            </a:r>
+            <a:r>
+              <a:rPr lang="en-US" dirty="0" err="1"/>
+              <a:t>rama</a:t>
+            </a:r>
+            <a:r>
+              <a:rPr lang="en-US" dirty="0"/>
+              <a:t> principal.</a:t>
+            </a:r>
+          </a:p>
+          <a:p>
+            <a:endParaRPr lang="en-US" dirty="0"/>
+          </a:p>
+          <a:p>
+            <a:r>
+              <a:rPr lang="en-US" dirty="0" err="1"/>
+              <a:t>Utilizamos</a:t>
+            </a:r>
+            <a:r>
+              <a:rPr lang="en-US" dirty="0"/>
+              <a:t> </a:t>
+            </a:r>
+            <a:r>
+              <a:rPr lang="en-US" dirty="0" err="1"/>
+              <a:t>autenticación</a:t>
+            </a:r>
+            <a:r>
+              <a:rPr lang="en-US" dirty="0"/>
+              <a:t> JWT, cuatro roles — </a:t>
+            </a:r>
+            <a:r>
+              <a:rPr lang="en-US" dirty="0" err="1"/>
+              <a:t>administrador</a:t>
+            </a:r>
+            <a:r>
+              <a:rPr lang="en-US" dirty="0"/>
+              <a:t>, </a:t>
+            </a:r>
+            <a:r>
+              <a:rPr lang="en-US" dirty="0" err="1"/>
+              <a:t>clínico</a:t>
+            </a:r>
+            <a:r>
+              <a:rPr lang="en-US" dirty="0"/>
+              <a:t>, </a:t>
+            </a:r>
+            <a:r>
+              <a:rPr lang="en-US" dirty="0" err="1"/>
+              <a:t>analista</a:t>
+            </a:r>
+            <a:r>
+              <a:rPr lang="en-US" dirty="0"/>
+              <a:t> y </a:t>
+            </a:r>
+            <a:r>
+              <a:rPr lang="en-US" dirty="0" err="1"/>
+              <a:t>enfermería</a:t>
+            </a:r>
+            <a:r>
+              <a:rPr lang="en-US" dirty="0"/>
+              <a:t> — y un </a:t>
+            </a:r>
+            <a:r>
+              <a:rPr lang="en-US" dirty="0" err="1"/>
+              <a:t>esquema</a:t>
+            </a:r>
+            <a:r>
+              <a:rPr lang="en-US" dirty="0"/>
+              <a:t> </a:t>
+            </a:r>
+            <a:r>
+              <a:rPr lang="en-US" dirty="0" err="1"/>
+              <a:t>relacional</a:t>
+            </a:r>
+            <a:r>
+              <a:rPr lang="en-US" dirty="0"/>
+              <a:t> </a:t>
+            </a:r>
+            <a:r>
+              <a:rPr lang="en-US" dirty="0" err="1"/>
+              <a:t>normalizado</a:t>
+            </a:r>
+            <a:r>
+              <a:rPr lang="en-US" dirty="0"/>
+              <a:t> </a:t>
+            </a:r>
+            <a:r>
+              <a:rPr lang="en-US" dirty="0" err="1"/>
+              <a:t>documentado</a:t>
+            </a:r>
+            <a:r>
+              <a:rPr lang="en-US" dirty="0"/>
+              <a:t> con </a:t>
+            </a:r>
+            <a:r>
+              <a:rPr lang="en-US" dirty="0" err="1"/>
+              <a:t>diagramas</a:t>
+            </a:r>
+            <a:r>
+              <a:rPr lang="en-US" dirty="0"/>
+              <a:t>  </a:t>
+            </a:r>
+            <a:r>
+              <a:rPr lang="en-US" dirty="0" err="1"/>
+              <a:t>entidad-relación</a:t>
+            </a:r>
+            <a:r>
+              <a:rPr lang="en-US" dirty="0"/>
+              <a:t>.»</a:t>
+            </a:r>
+          </a:p>
+          <a:p>
+            <a:endParaRPr lang="en-US" dirty="0"/>
+          </a:p>
+        </p:txBody>
+      </p:sp>
+      <p:sp>
+        <p:nvSpPr>
+          <p:cNvPr id="4" name="Slide Number Placeholder 3"/>
+          <p:cNvSpPr>
+            <a:spLocks noGrp="1"/>
+          </p:cNvSpPr>
+          <p:nvPr>
+            <p:ph type="sldNum" sz="quarter" idx="5"/>
+          </p:nvPr>
+        </p:nvSpPr>
+        <p:spPr/>
+        <p:txBody>
+          <a:bodyPr/>
+          <a:lstStyle/>
+          <a:p>
+            <a:fld id="{12BC5CD0-964A-412E-BAD3-D4ECB486B5E6}" type="slidenum">
+              <a:rPr lang="en-US" smtClean="0"/>
+              <a:t>10</a:t>
+            </a:fld>
+            <a:endParaRPr lang="en-US"/>
+          </a:p>
+        </p:txBody>
+      </p:sp>
+    </p:spTree>
+    <p:extLst>
+      <p:ext uri="{BB962C8B-B14F-4D97-AF65-F5344CB8AC3E}">
+        <p14:creationId xmlns:p14="http://schemas.microsoft.com/office/powerpoint/2010/main" val="2764233382"/>
+      </p:ext>
+    </p:extLst>
+  </p:cSld>
+  <p:clrMapOvr>
+    <a:masterClrMapping/>
+  </p:clrMapOvr>
+</p:notes>
+</file>
+
+<file path=ppt/notesSlides/notesSlide11.xml><?xml version="1.0" encoding="utf-8"?>
+<p:notes xmlns:a="http://schemas.openxmlformats.org/drawingml/2006/main" xmlns:r="http://schemas.openxmlformats.org/officeDocument/2006/relationships" xmlns:p="http://schemas.openxmlformats.org/presentationml/2006/main">
+  <p:cSld>
+    <p:spTree>
+      <p:nvGrpSpPr>
+        <p:cNvPr id="1" name=""/>
+        <p:cNvGrpSpPr/>
+        <p:nvPr/>
+      </p:nvGrpSpPr>
+      <p:grpSpPr>
+        <a:xfrm>
+          <a:off x="0" y="0"/>
+          <a:ext cx="0" cy="0"/>
+          <a:chOff x="0" y="0"/>
+          <a:chExt cx="0" cy="0"/>
+        </a:xfrm>
+      </p:grpSpPr>
+      <p:sp>
+        <p:nvSpPr>
+          <p:cNvPr id="2" name="Slide Image Placeholder 1"/>
+          <p:cNvSpPr>
+            <a:spLocks noGrp="1" noRot="1" noChangeAspect="1"/>
+          </p:cNvSpPr>
+          <p:nvPr>
+            <p:ph type="sldImg"/>
+          </p:nvPr>
+        </p:nvSpPr>
+        <p:spPr/>
+      </p:sp>
+      <p:sp>
+        <p:nvSpPr>
+          <p:cNvPr id="3" name="Notes Placeholder 2"/>
+          <p:cNvSpPr>
+            <a:spLocks noGrp="1"/>
+          </p:cNvSpPr>
+          <p:nvPr>
+            <p:ph type="body" idx="1"/>
+          </p:nvPr>
+        </p:nvSpPr>
+        <p:spPr/>
+        <p:txBody>
+          <a:bodyPr/>
+          <a:lstStyle/>
+          <a:p>
+            <a:r>
+              <a:rPr lang="en-US" dirty="0"/>
+              <a:t>«En </a:t>
+            </a:r>
+            <a:r>
+              <a:rPr lang="en-US" dirty="0" err="1"/>
+              <a:t>conclusión</a:t>
+            </a:r>
+            <a:r>
+              <a:rPr lang="en-US" dirty="0"/>
+              <a:t>: se ha </a:t>
+            </a:r>
+            <a:r>
+              <a:rPr lang="en-US" dirty="0" err="1"/>
+              <a:t>entregado</a:t>
+            </a:r>
+            <a:r>
+              <a:rPr lang="en-US" dirty="0"/>
+              <a:t> un </a:t>
+            </a:r>
+            <a:r>
+              <a:rPr lang="en-US" b="1" dirty="0" err="1"/>
+              <a:t>proyecto</a:t>
+            </a:r>
+            <a:r>
+              <a:rPr lang="en-US" b="1" dirty="0"/>
+              <a:t> </a:t>
+            </a:r>
+            <a:r>
+              <a:rPr lang="en-US" b="1" dirty="0" err="1"/>
+              <a:t>funcional</a:t>
+            </a:r>
+            <a:r>
+              <a:rPr lang="en-US" b="1" dirty="0"/>
+              <a:t> de extremo a extremo</a:t>
+            </a:r>
+            <a:r>
+              <a:rPr lang="en-US" dirty="0"/>
+              <a:t>, </a:t>
+            </a:r>
+            <a:r>
+              <a:rPr lang="en-US" dirty="0" err="1"/>
+              <a:t>desplegado</a:t>
+            </a:r>
+            <a:r>
+              <a:rPr lang="en-US" dirty="0"/>
+              <a:t> </a:t>
+            </a:r>
+            <a:r>
+              <a:rPr lang="en-US" dirty="0" err="1"/>
+              <a:t>en</a:t>
+            </a:r>
+            <a:r>
+              <a:rPr lang="en-US" dirty="0"/>
+              <a:t> la </a:t>
+            </a:r>
+            <a:r>
+              <a:rPr lang="en-US" dirty="0" err="1"/>
+              <a:t>nube</a:t>
+            </a:r>
+            <a:r>
+              <a:rPr lang="en-US" dirty="0"/>
+              <a:t>, </a:t>
+            </a:r>
+            <a:r>
+              <a:rPr lang="en-US" dirty="0" err="1"/>
+              <a:t>que</a:t>
+            </a:r>
+            <a:r>
+              <a:rPr lang="en-US" dirty="0"/>
+              <a:t> integra </a:t>
+            </a:r>
+            <a:r>
+              <a:rPr lang="en-US" dirty="0" err="1"/>
+              <a:t>predicción</a:t>
+            </a:r>
+            <a:r>
+              <a:rPr lang="en-US" dirty="0"/>
+              <a:t>, </a:t>
+            </a:r>
+            <a:r>
+              <a:rPr lang="en-US" dirty="0" err="1"/>
+              <a:t>explicabilidad</a:t>
+            </a:r>
+            <a:r>
+              <a:rPr lang="en-US" dirty="0"/>
+              <a:t> SHAP y </a:t>
+            </a:r>
+            <a:r>
+              <a:rPr lang="en-US" dirty="0" err="1"/>
+              <a:t>simulación</a:t>
+            </a:r>
+            <a:r>
+              <a:rPr lang="en-US" dirty="0"/>
+              <a:t> </a:t>
+            </a:r>
+            <a:r>
+              <a:rPr lang="en-US" dirty="0" err="1"/>
+              <a:t>en</a:t>
+            </a:r>
+            <a:r>
+              <a:rPr lang="en-US" dirty="0"/>
+              <a:t> </a:t>
+            </a:r>
+            <a:r>
+              <a:rPr lang="en-US" dirty="0" err="1"/>
+              <a:t>una</a:t>
+            </a:r>
+            <a:r>
+              <a:rPr lang="en-US" dirty="0"/>
+              <a:t> </a:t>
+            </a:r>
+            <a:r>
+              <a:rPr lang="en-US" dirty="0" err="1"/>
+              <a:t>experiencia</a:t>
+            </a:r>
+            <a:r>
+              <a:rPr lang="en-US" dirty="0"/>
+              <a:t> de </a:t>
+            </a:r>
+            <a:r>
+              <a:rPr lang="en-US" dirty="0" err="1"/>
+              <a:t>usuario</a:t>
+            </a:r>
+            <a:r>
+              <a:rPr lang="en-US" dirty="0"/>
+              <a:t> </a:t>
+            </a:r>
+            <a:r>
+              <a:rPr lang="en-US" dirty="0" err="1"/>
+              <a:t>clínica</a:t>
+            </a:r>
+            <a:r>
+              <a:rPr lang="en-US" dirty="0"/>
+              <a:t> moderna.</a:t>
+            </a:r>
+          </a:p>
+          <a:p>
+            <a:endParaRPr lang="en-US" dirty="0"/>
+          </a:p>
+          <a:p>
+            <a:r>
+              <a:rPr lang="en-US" dirty="0"/>
+              <a:t>El valor del Proyecto no reside solo </a:t>
+            </a:r>
+            <a:r>
+              <a:rPr lang="en-US" dirty="0" err="1"/>
+              <a:t>en</a:t>
+            </a:r>
+            <a:r>
+              <a:rPr lang="en-US" dirty="0"/>
+              <a:t> </a:t>
+            </a:r>
+            <a:r>
+              <a:rPr lang="en-US" dirty="0" err="1"/>
+              <a:t>el</a:t>
+            </a:r>
+            <a:r>
+              <a:rPr lang="en-US" dirty="0"/>
+              <a:t> </a:t>
+            </a:r>
+            <a:r>
+              <a:rPr lang="en-US" dirty="0" err="1"/>
+              <a:t>porcentaje</a:t>
+            </a:r>
+            <a:r>
+              <a:rPr lang="en-US" dirty="0"/>
+              <a:t> de accuracy — </a:t>
+            </a:r>
+            <a:r>
+              <a:rPr lang="en-US" dirty="0" err="1"/>
+              <a:t>que</a:t>
+            </a:r>
+            <a:r>
+              <a:rPr lang="en-US" dirty="0"/>
+              <a:t> es </a:t>
+            </a:r>
+            <a:r>
+              <a:rPr lang="en-US" dirty="0" err="1"/>
+              <a:t>mejorable</a:t>
+            </a:r>
+            <a:r>
+              <a:rPr lang="en-US" dirty="0"/>
+              <a:t> — </a:t>
+            </a:r>
+            <a:r>
+              <a:rPr lang="en-US" dirty="0" err="1"/>
+              <a:t>sino</a:t>
+            </a:r>
+            <a:r>
+              <a:rPr lang="en-US" dirty="0"/>
+              <a:t> </a:t>
+            </a:r>
+            <a:r>
+              <a:rPr lang="en-US" dirty="0" err="1"/>
+              <a:t>en</a:t>
+            </a:r>
+            <a:r>
+              <a:rPr lang="en-US" dirty="0"/>
+              <a:t> la </a:t>
+            </a:r>
+            <a:r>
+              <a:rPr lang="en-US" b="1" dirty="0" err="1"/>
+              <a:t>arquitectura</a:t>
+            </a:r>
+            <a:r>
+              <a:rPr lang="en-US" b="1" dirty="0"/>
+              <a:t> auditable</a:t>
+            </a:r>
+            <a:r>
+              <a:rPr lang="en-US" dirty="0"/>
+              <a:t>, la </a:t>
+            </a:r>
+            <a:r>
+              <a:rPr lang="en-US" b="1" dirty="0" err="1"/>
+              <a:t>transparencia</a:t>
+            </a:r>
+            <a:r>
+              <a:rPr lang="en-US" dirty="0"/>
+              <a:t> </a:t>
+            </a:r>
+            <a:r>
+              <a:rPr lang="en-US" dirty="0" err="1"/>
+              <a:t>frente</a:t>
+            </a:r>
+            <a:r>
+              <a:rPr lang="en-US" dirty="0"/>
+              <a:t> al </a:t>
+            </a:r>
+            <a:r>
+              <a:rPr lang="en-US" dirty="0" err="1"/>
+              <a:t>clínico</a:t>
+            </a:r>
+            <a:r>
+              <a:rPr lang="en-US" dirty="0"/>
+              <a:t>, y la </a:t>
+            </a:r>
+            <a:r>
+              <a:rPr lang="en-US" b="1" dirty="0" err="1"/>
+              <a:t>reproducibilidad</a:t>
+            </a:r>
+            <a:r>
+              <a:rPr lang="en-US" dirty="0"/>
+              <a:t> del pipeline </a:t>
+            </a:r>
+            <a:r>
+              <a:rPr lang="en-US" dirty="0" err="1"/>
+              <a:t>completo</a:t>
+            </a:r>
+            <a:r>
+              <a:rPr lang="en-US" dirty="0"/>
+              <a:t>, </a:t>
+            </a:r>
+            <a:r>
+              <a:rPr lang="en-US" dirty="0" err="1"/>
+              <a:t>desde</a:t>
+            </a:r>
+            <a:r>
+              <a:rPr lang="en-US" dirty="0"/>
+              <a:t> </a:t>
+            </a:r>
+            <a:r>
+              <a:rPr lang="en-US" dirty="0" err="1"/>
+              <a:t>el</a:t>
+            </a:r>
+            <a:r>
+              <a:rPr lang="en-US" dirty="0"/>
+              <a:t> dataset </a:t>
+            </a:r>
+            <a:r>
+              <a:rPr lang="en-US" dirty="0" err="1"/>
+              <a:t>público</a:t>
+            </a:r>
+            <a:r>
+              <a:rPr lang="en-US" dirty="0"/>
+              <a:t> hasta la </a:t>
+            </a:r>
+            <a:r>
+              <a:rPr lang="en-US" dirty="0" err="1"/>
+              <a:t>inferencia</a:t>
+            </a:r>
+            <a:r>
+              <a:rPr lang="en-US" dirty="0"/>
+              <a:t> </a:t>
+            </a:r>
+            <a:r>
+              <a:rPr lang="en-US" dirty="0" err="1"/>
+              <a:t>en</a:t>
+            </a:r>
+            <a:r>
+              <a:rPr lang="en-US" dirty="0"/>
+              <a:t> </a:t>
+            </a:r>
+            <a:r>
+              <a:rPr lang="en-US" dirty="0" err="1"/>
+              <a:t>producción</a:t>
+            </a:r>
+            <a:r>
+              <a:rPr lang="en-US" dirty="0"/>
+              <a:t>.</a:t>
+            </a:r>
+          </a:p>
+          <a:p>
+            <a:endParaRPr lang="en-US" dirty="0"/>
+          </a:p>
+          <a:p>
+            <a:endParaRPr lang="en-US" dirty="0"/>
+          </a:p>
+        </p:txBody>
+      </p:sp>
+      <p:sp>
+        <p:nvSpPr>
+          <p:cNvPr id="4" name="Slide Number Placeholder 3"/>
+          <p:cNvSpPr>
+            <a:spLocks noGrp="1"/>
+          </p:cNvSpPr>
+          <p:nvPr>
+            <p:ph type="sldNum" sz="quarter" idx="5"/>
+          </p:nvPr>
+        </p:nvSpPr>
+        <p:spPr/>
+        <p:txBody>
+          <a:bodyPr/>
+          <a:lstStyle/>
+          <a:p>
+            <a:fld id="{12BC5CD0-964A-412E-BAD3-D4ECB486B5E6}" type="slidenum">
+              <a:rPr lang="en-US" smtClean="0"/>
+              <a:t>11</a:t>
+            </a:fld>
+            <a:endParaRPr lang="en-US"/>
+          </a:p>
+        </p:txBody>
+      </p:sp>
+    </p:spTree>
+    <p:extLst>
+      <p:ext uri="{BB962C8B-B14F-4D97-AF65-F5344CB8AC3E}">
+        <p14:creationId xmlns:p14="http://schemas.microsoft.com/office/powerpoint/2010/main" val="2579983610"/>
+      </p:ext>
+    </p:extLst>
+  </p:cSld>
+  <p:clrMapOvr>
+    <a:masterClrMapping/>
+  </p:clrMapOvr>
+</p:notes>
+</file>
+
+<file path=ppt/notesSlides/notesSlide12.xml><?xml version="1.0" encoding="utf-8"?>
+<p:notes xmlns:a="http://schemas.openxmlformats.org/drawingml/2006/main" xmlns:r="http://schemas.openxmlformats.org/officeDocument/2006/relationships" xmlns:p="http://schemas.openxmlformats.org/presentationml/2006/main">
+  <p:cSld>
+    <p:spTree>
+      <p:nvGrpSpPr>
+        <p:cNvPr id="1" name=""/>
+        <p:cNvGrpSpPr/>
+        <p:nvPr/>
+      </p:nvGrpSpPr>
+      <p:grpSpPr>
+        <a:xfrm>
+          <a:off x="0" y="0"/>
+          <a:ext cx="0" cy="0"/>
+          <a:chOff x="0" y="0"/>
+          <a:chExt cx="0" cy="0"/>
+        </a:xfrm>
+      </p:grpSpPr>
+      <p:sp>
+        <p:nvSpPr>
+          <p:cNvPr id="2" name="Slide Image Placeholder 1"/>
+          <p:cNvSpPr>
+            <a:spLocks noGrp="1" noRot="1" noChangeAspect="1"/>
+          </p:cNvSpPr>
+          <p:nvPr>
+            <p:ph type="sldImg"/>
+          </p:nvPr>
+        </p:nvSpPr>
+        <p:spPr/>
+      </p:sp>
+      <p:sp>
+        <p:nvSpPr>
+          <p:cNvPr id="3" name="Notes Placeholder 2"/>
+          <p:cNvSpPr>
+            <a:spLocks noGrp="1"/>
+          </p:cNvSpPr>
+          <p:nvPr>
+            <p:ph type="body" idx="1"/>
+          </p:nvPr>
+        </p:nvSpPr>
+        <p:spPr/>
+        <p:txBody>
+          <a:bodyPr/>
+          <a:lstStyle/>
+          <a:p>
+            <a:r>
+              <a:rPr lang="en-US" dirty="0"/>
+              <a:t>«Como </a:t>
+            </a:r>
+            <a:r>
+              <a:rPr lang="en-US" dirty="0" err="1"/>
+              <a:t>trabajo</a:t>
+            </a:r>
+            <a:r>
+              <a:rPr lang="en-US" dirty="0"/>
+              <a:t> future se </a:t>
+            </a:r>
+            <a:r>
+              <a:rPr lang="en-US" dirty="0" err="1"/>
+              <a:t>podrían</a:t>
+            </a:r>
+            <a:r>
+              <a:rPr lang="en-US" dirty="0"/>
+              <a:t> </a:t>
+            </a:r>
+            <a:r>
+              <a:rPr lang="en-US" dirty="0" err="1"/>
+              <a:t>implementar</a:t>
+            </a:r>
+            <a:r>
+              <a:rPr lang="en-US" dirty="0"/>
+              <a:t> las </a:t>
+            </a:r>
+            <a:r>
+              <a:rPr lang="en-US" dirty="0" err="1"/>
+              <a:t>siguientes</a:t>
+            </a:r>
+            <a:r>
+              <a:rPr lang="en-US" dirty="0"/>
+              <a:t> </a:t>
+            </a:r>
+            <a:r>
+              <a:rPr lang="en-US" dirty="0" err="1"/>
+              <a:t>mejoras</a:t>
+            </a:r>
+            <a:r>
+              <a:rPr lang="en-US" dirty="0"/>
+              <a:t>: </a:t>
+            </a:r>
+            <a:r>
+              <a:rPr lang="en-US" dirty="0" err="1"/>
+              <a:t>validación</a:t>
+            </a:r>
+            <a:r>
+              <a:rPr lang="en-US" dirty="0"/>
+              <a:t> </a:t>
+            </a:r>
+            <a:r>
+              <a:rPr lang="en-US" dirty="0" err="1"/>
+              <a:t>en</a:t>
+            </a:r>
+            <a:r>
+              <a:rPr lang="en-US" dirty="0"/>
+              <a:t> </a:t>
+            </a:r>
+            <a:r>
+              <a:rPr lang="en-US" dirty="0" err="1"/>
+              <a:t>centros</a:t>
+            </a:r>
+            <a:r>
+              <a:rPr lang="en-US" dirty="0"/>
+              <a:t> </a:t>
+            </a:r>
+            <a:r>
+              <a:rPr lang="en-US" dirty="0" err="1"/>
+              <a:t>hospitalarios</a:t>
+            </a:r>
+            <a:r>
+              <a:rPr lang="en-US" dirty="0"/>
+              <a:t>, </a:t>
+            </a:r>
+            <a:r>
+              <a:rPr lang="en-US" dirty="0" err="1"/>
+              <a:t>calibración</a:t>
+            </a:r>
+            <a:r>
+              <a:rPr lang="en-US" dirty="0"/>
+              <a:t> del umbral, </a:t>
+            </a:r>
+            <a:r>
+              <a:rPr lang="en-US" dirty="0" err="1"/>
+              <a:t>integración</a:t>
+            </a:r>
+            <a:r>
+              <a:rPr lang="en-US" dirty="0"/>
+              <a:t> con </a:t>
+            </a:r>
+            <a:r>
+              <a:rPr lang="en-US" dirty="0" err="1"/>
+              <a:t>estándares</a:t>
+            </a:r>
+            <a:r>
+              <a:rPr lang="en-US" dirty="0"/>
+              <a:t> </a:t>
+            </a:r>
+            <a:r>
+              <a:rPr lang="en-US" dirty="0" err="1"/>
+              <a:t>como</a:t>
+            </a:r>
+            <a:r>
+              <a:rPr lang="en-US" dirty="0"/>
+              <a:t> FHIR, y </a:t>
+            </a:r>
+            <a:r>
+              <a:rPr lang="en-US" dirty="0" err="1"/>
+              <a:t>evolución</a:t>
+            </a:r>
+            <a:r>
+              <a:rPr lang="en-US" dirty="0"/>
+              <a:t> del </a:t>
+            </a:r>
+            <a:r>
+              <a:rPr lang="en-US" dirty="0" err="1"/>
+              <a:t>modelo</a:t>
+            </a:r>
+            <a:r>
+              <a:rPr lang="en-US" dirty="0"/>
+              <a:t> con </a:t>
+            </a:r>
+            <a:r>
+              <a:rPr lang="en-US" dirty="0" err="1"/>
+              <a:t>más</a:t>
+            </a:r>
+            <a:r>
+              <a:rPr lang="en-US" dirty="0"/>
+              <a:t> variables </a:t>
+            </a:r>
+            <a:r>
+              <a:rPr lang="en-US" dirty="0" err="1"/>
+              <a:t>clínicas</a:t>
+            </a:r>
+            <a:r>
+              <a:rPr lang="en-US" dirty="0"/>
+              <a:t>.</a:t>
+            </a:r>
+          </a:p>
+          <a:p>
+            <a:endParaRPr lang="en-US" dirty="0"/>
+          </a:p>
+          <a:p>
+            <a:r>
+              <a:rPr lang="en-US" dirty="0" err="1"/>
+              <a:t>Muchas</a:t>
+            </a:r>
+            <a:r>
+              <a:rPr lang="en-US" dirty="0"/>
+              <a:t> gracias </a:t>
+            </a:r>
+            <a:r>
+              <a:rPr lang="en-US" dirty="0" err="1"/>
+              <a:t>por</a:t>
+            </a:r>
+            <a:r>
+              <a:rPr lang="en-US" dirty="0"/>
+              <a:t> </a:t>
+            </a:r>
+            <a:r>
+              <a:rPr lang="en-US" dirty="0" err="1"/>
+              <a:t>su</a:t>
+            </a:r>
+            <a:r>
+              <a:rPr lang="en-US" dirty="0"/>
+              <a:t> </a:t>
+            </a:r>
+            <a:r>
+              <a:rPr lang="en-US" dirty="0" err="1"/>
+              <a:t>atención</a:t>
+            </a:r>
+            <a:r>
+              <a:rPr lang="en-US" dirty="0"/>
+              <a:t>. Quedo a </a:t>
+            </a:r>
+            <a:r>
+              <a:rPr lang="en-US" dirty="0" err="1"/>
+              <a:t>disposición</a:t>
+            </a:r>
+            <a:r>
+              <a:rPr lang="en-US" dirty="0"/>
+              <a:t> para </a:t>
+            </a:r>
+            <a:r>
+              <a:rPr lang="en-US" dirty="0" err="1"/>
+              <a:t>cualquier</a:t>
+            </a:r>
+            <a:r>
+              <a:rPr lang="en-US" dirty="0"/>
+              <a:t> </a:t>
+            </a:r>
+            <a:r>
+              <a:rPr lang="en-US" dirty="0" err="1"/>
+              <a:t>aclaración</a:t>
+            </a:r>
+            <a:r>
+              <a:rPr lang="en-US" dirty="0"/>
+              <a:t> </a:t>
+            </a:r>
+            <a:r>
+              <a:rPr lang="en-US" dirty="0" err="1"/>
+              <a:t>sobre</a:t>
+            </a:r>
+            <a:r>
+              <a:rPr lang="en-US" dirty="0"/>
+              <a:t> la memoria o </a:t>
+            </a:r>
+            <a:r>
+              <a:rPr lang="en-US" dirty="0" err="1"/>
+              <a:t>el</a:t>
+            </a:r>
+            <a:r>
+              <a:rPr lang="en-US" dirty="0"/>
+              <a:t> </a:t>
+            </a:r>
+            <a:r>
+              <a:rPr lang="en-US" dirty="0" err="1"/>
+              <a:t>código</a:t>
+            </a:r>
+            <a:r>
+              <a:rPr lang="en-US" dirty="0"/>
+              <a:t> del </a:t>
+            </a:r>
+            <a:r>
+              <a:rPr lang="en-US" dirty="0" err="1"/>
+              <a:t>repositorio</a:t>
+            </a:r>
+            <a:r>
+              <a:rPr lang="en-US" dirty="0"/>
+              <a:t>.»</a:t>
+            </a:r>
+          </a:p>
+          <a:p>
+            <a:endParaRPr lang="en-US" dirty="0"/>
+          </a:p>
+        </p:txBody>
+      </p:sp>
+      <p:sp>
+        <p:nvSpPr>
+          <p:cNvPr id="4" name="Slide Number Placeholder 3"/>
+          <p:cNvSpPr>
+            <a:spLocks noGrp="1"/>
+          </p:cNvSpPr>
+          <p:nvPr>
+            <p:ph type="sldNum" sz="quarter" idx="5"/>
+          </p:nvPr>
+        </p:nvSpPr>
+        <p:spPr/>
+        <p:txBody>
+          <a:bodyPr/>
+          <a:lstStyle/>
+          <a:p>
+            <a:fld id="{12BC5CD0-964A-412E-BAD3-D4ECB486B5E6}" type="slidenum">
+              <a:rPr lang="en-US" smtClean="0"/>
+              <a:t>12</a:t>
+            </a:fld>
+            <a:endParaRPr lang="en-US"/>
+          </a:p>
+        </p:txBody>
+      </p:sp>
+    </p:spTree>
+    <p:extLst>
+      <p:ext uri="{BB962C8B-B14F-4D97-AF65-F5344CB8AC3E}">
+        <p14:creationId xmlns:p14="http://schemas.microsoft.com/office/powerpoint/2010/main" val="1046196351"/>
+      </p:ext>
+    </p:extLst>
+  </p:cSld>
+  <p:clrMapOvr>
+    <a:masterClrMapping/>
+  </p:clrMapOvr>
+</p:notes>
+</file>
+
+<file path=ppt/notesSlides/notesSlide2.xml><?xml version="1.0" encoding="utf-8"?>
+<p:notes xmlns:a="http://schemas.openxmlformats.org/drawingml/2006/main" xmlns:r="http://schemas.openxmlformats.org/officeDocument/2006/relationships" xmlns:p="http://schemas.openxmlformats.org/presentationml/2006/main">
+  <p:cSld>
+    <p:spTree>
+      <p:nvGrpSpPr>
+        <p:cNvPr id="1" name=""/>
+        <p:cNvGrpSpPr/>
+        <p:nvPr/>
+      </p:nvGrpSpPr>
+      <p:grpSpPr>
+        <a:xfrm>
+          <a:off x="0" y="0"/>
+          <a:ext cx="0" cy="0"/>
+          <a:chOff x="0" y="0"/>
+          <a:chExt cx="0" cy="0"/>
+        </a:xfrm>
+      </p:grpSpPr>
+      <p:sp>
+        <p:nvSpPr>
+          <p:cNvPr id="2" name="Slide Image Placeholder 1"/>
+          <p:cNvSpPr>
+            <a:spLocks noGrp="1" noRot="1" noChangeAspect="1"/>
+          </p:cNvSpPr>
+          <p:nvPr>
+            <p:ph type="sldImg"/>
+          </p:nvPr>
+        </p:nvSpPr>
+        <p:spPr/>
+      </p:sp>
+      <p:sp>
+        <p:nvSpPr>
+          <p:cNvPr id="3" name="Notes Placeholder 2"/>
+          <p:cNvSpPr>
+            <a:spLocks noGrp="1"/>
+          </p:cNvSpPr>
+          <p:nvPr>
+            <p:ph type="body" idx="1"/>
+          </p:nvPr>
+        </p:nvSpPr>
+        <p:spPr/>
+        <p:txBody>
+          <a:bodyPr/>
+          <a:lstStyle/>
+          <a:p>
+            <a:r>
+              <a:rPr lang="en-US" dirty="0"/>
+              <a:t>«Hoy </a:t>
+            </a:r>
+            <a:r>
+              <a:rPr lang="en-US" dirty="0" err="1"/>
+              <a:t>en</a:t>
+            </a:r>
+            <a:r>
+              <a:rPr lang="en-US" dirty="0"/>
+              <a:t> día, las </a:t>
+            </a:r>
+            <a:r>
+              <a:rPr lang="en-US" dirty="0" err="1"/>
+              <a:t>readmisiones</a:t>
+            </a:r>
+            <a:r>
+              <a:rPr lang="en-US" dirty="0"/>
+              <a:t> </a:t>
+            </a:r>
+            <a:r>
+              <a:rPr lang="en-US" dirty="0" err="1"/>
+              <a:t>hospitalarias</a:t>
+            </a:r>
+            <a:r>
+              <a:rPr lang="en-US" dirty="0"/>
+              <a:t> </a:t>
+            </a:r>
+            <a:r>
+              <a:rPr lang="en-US" dirty="0" err="1"/>
+              <a:t>en</a:t>
+            </a:r>
+            <a:r>
+              <a:rPr lang="en-US" dirty="0"/>
+              <a:t> </a:t>
+            </a:r>
+            <a:r>
+              <a:rPr lang="en-US" dirty="0" err="1"/>
+              <a:t>los</a:t>
+            </a:r>
+            <a:r>
+              <a:rPr lang="en-US" dirty="0"/>
+              <a:t> primeros </a:t>
+            </a:r>
+            <a:r>
+              <a:rPr lang="en-US" dirty="0" err="1"/>
+              <a:t>treinta</a:t>
+            </a:r>
+            <a:r>
+              <a:rPr lang="en-US" dirty="0"/>
+              <a:t> días </a:t>
+            </a:r>
+            <a:r>
+              <a:rPr lang="en-US" dirty="0" err="1"/>
+              <a:t>suponen</a:t>
+            </a:r>
+            <a:r>
+              <a:rPr lang="en-US" dirty="0"/>
+              <a:t> un </a:t>
+            </a:r>
+            <a:r>
+              <a:rPr lang="en-US" dirty="0" err="1"/>
+              <a:t>coste</a:t>
+            </a:r>
+            <a:r>
+              <a:rPr lang="en-US" dirty="0"/>
+              <a:t> </a:t>
+            </a:r>
+            <a:r>
+              <a:rPr lang="en-US" dirty="0" err="1"/>
+              <a:t>muy</a:t>
+            </a:r>
+            <a:r>
+              <a:rPr lang="en-US" dirty="0"/>
+              <a:t> </a:t>
+            </a:r>
+            <a:r>
+              <a:rPr lang="en-US" dirty="0" err="1"/>
+              <a:t>elevado</a:t>
+            </a:r>
+            <a:r>
+              <a:rPr lang="en-US" dirty="0"/>
+              <a:t> y, </a:t>
+            </a:r>
+            <a:r>
+              <a:rPr lang="en-US" dirty="0" err="1"/>
+              <a:t>en</a:t>
+            </a:r>
+            <a:r>
+              <a:rPr lang="en-US" dirty="0"/>
+              <a:t> </a:t>
+            </a:r>
+            <a:r>
+              <a:rPr lang="en-US" dirty="0" err="1"/>
+              <a:t>muchos</a:t>
+            </a:r>
+            <a:r>
+              <a:rPr lang="en-US" dirty="0"/>
+              <a:t> </a:t>
+            </a:r>
+            <a:r>
+              <a:rPr lang="en-US" dirty="0" err="1"/>
+              <a:t>casos</a:t>
+            </a:r>
+            <a:r>
+              <a:rPr lang="en-US" dirty="0"/>
+              <a:t>, son </a:t>
+            </a:r>
+            <a:r>
+              <a:rPr lang="en-US" dirty="0" err="1"/>
+              <a:t>prevenibles</a:t>
+            </a:r>
+            <a:r>
+              <a:rPr lang="en-US" dirty="0"/>
+              <a:t> </a:t>
+            </a:r>
+            <a:r>
+              <a:rPr lang="en-US" dirty="0" err="1"/>
+              <a:t>si</a:t>
+            </a:r>
+            <a:r>
+              <a:rPr lang="en-US" dirty="0"/>
+              <a:t> se </a:t>
+            </a:r>
+            <a:r>
+              <a:rPr lang="en-US" dirty="0" err="1"/>
+              <a:t>identifica</a:t>
+            </a:r>
+            <a:r>
+              <a:rPr lang="en-US" dirty="0"/>
+              <a:t> a </a:t>
+            </a:r>
+            <a:r>
+              <a:rPr lang="en-US" dirty="0" err="1"/>
+              <a:t>tiempo</a:t>
+            </a:r>
+            <a:r>
+              <a:rPr lang="en-US" dirty="0"/>
+              <a:t> al </a:t>
+            </a:r>
+            <a:r>
+              <a:rPr lang="en-US" dirty="0" err="1"/>
+              <a:t>paciente</a:t>
+            </a:r>
+            <a:r>
+              <a:rPr lang="en-US" dirty="0"/>
+              <a:t> de alto </a:t>
+            </a:r>
+            <a:r>
+              <a:rPr lang="en-US" dirty="0" err="1"/>
+              <a:t>riesgo</a:t>
+            </a:r>
+            <a:r>
+              <a:rPr lang="en-US" dirty="0"/>
+              <a:t>.</a:t>
+            </a:r>
+          </a:p>
+          <a:p>
+            <a:endParaRPr lang="en-US" dirty="0"/>
+          </a:p>
+          <a:p>
+            <a:r>
+              <a:rPr lang="en-US" dirty="0"/>
+              <a:t>El </a:t>
+            </a:r>
+            <a:r>
+              <a:rPr lang="en-US" dirty="0" err="1"/>
+              <a:t>problema</a:t>
+            </a:r>
+            <a:r>
+              <a:rPr lang="en-US" dirty="0"/>
+              <a:t> es </a:t>
+            </a:r>
+            <a:r>
+              <a:rPr lang="en-US" dirty="0" err="1"/>
+              <a:t>que</a:t>
+            </a:r>
+            <a:r>
+              <a:rPr lang="en-US" dirty="0"/>
+              <a:t> </a:t>
+            </a:r>
+            <a:r>
+              <a:rPr lang="en-US" dirty="0" err="1"/>
+              <a:t>los</a:t>
+            </a:r>
+            <a:r>
+              <a:rPr lang="en-US" dirty="0"/>
+              <a:t> </a:t>
+            </a:r>
+            <a:r>
+              <a:rPr lang="en-US" dirty="0" err="1"/>
+              <a:t>sistemas</a:t>
+            </a:r>
+            <a:r>
+              <a:rPr lang="en-US" dirty="0"/>
+              <a:t> de </a:t>
+            </a:r>
+            <a:r>
+              <a:rPr lang="en-US" dirty="0" err="1"/>
+              <a:t>información</a:t>
+            </a:r>
+            <a:r>
+              <a:rPr lang="en-US" dirty="0"/>
+              <a:t> </a:t>
+            </a:r>
+            <a:r>
+              <a:rPr lang="en-US" dirty="0" err="1"/>
+              <a:t>hospitalaria</a:t>
+            </a:r>
+            <a:r>
+              <a:rPr lang="en-US" dirty="0"/>
+              <a:t> </a:t>
+            </a:r>
+            <a:r>
+              <a:rPr lang="en-US" b="1" dirty="0" err="1"/>
+              <a:t>almacenan</a:t>
+            </a:r>
+            <a:r>
+              <a:rPr lang="en-US" dirty="0"/>
+              <a:t> </a:t>
+            </a:r>
+            <a:r>
+              <a:rPr lang="en-US" dirty="0" err="1"/>
+              <a:t>datos</a:t>
+            </a:r>
+            <a:r>
+              <a:rPr lang="en-US" dirty="0"/>
+              <a:t>, </a:t>
+            </a:r>
+            <a:r>
+              <a:rPr lang="en-US" dirty="0" err="1"/>
+              <a:t>pero</a:t>
+            </a:r>
+            <a:r>
+              <a:rPr lang="en-US" dirty="0"/>
+              <a:t> no </a:t>
+            </a:r>
+            <a:r>
+              <a:rPr lang="en-US" dirty="0" err="1"/>
+              <a:t>siempre</a:t>
+            </a:r>
+            <a:r>
+              <a:rPr lang="en-US" dirty="0"/>
+              <a:t> </a:t>
+            </a:r>
+            <a:r>
+              <a:rPr lang="en-US" dirty="0" err="1"/>
+              <a:t>ayudan</a:t>
+            </a:r>
+            <a:r>
+              <a:rPr lang="en-US" dirty="0"/>
+              <a:t> al </a:t>
+            </a:r>
+            <a:r>
+              <a:rPr lang="en-US" dirty="0" err="1"/>
+              <a:t>clínico</a:t>
+            </a:r>
+            <a:r>
+              <a:rPr lang="en-US" dirty="0"/>
+              <a:t> a </a:t>
+            </a:r>
+            <a:r>
+              <a:rPr lang="en-US" b="1" dirty="0" err="1"/>
+              <a:t>anticipar</a:t>
+            </a:r>
+            <a:r>
+              <a:rPr lang="en-US" dirty="0"/>
+              <a:t> ese </a:t>
+            </a:r>
+            <a:r>
+              <a:rPr lang="en-US" dirty="0" err="1"/>
+              <a:t>riesgo</a:t>
+            </a:r>
+            <a:r>
+              <a:rPr lang="en-US" dirty="0"/>
+              <a:t> de forma </a:t>
+            </a:r>
+            <a:r>
+              <a:rPr lang="en-US" dirty="0" err="1"/>
+              <a:t>clara</a:t>
+            </a:r>
+            <a:r>
+              <a:rPr lang="en-US" dirty="0"/>
+              <a:t>.</a:t>
+            </a:r>
+          </a:p>
+          <a:p>
+            <a:endParaRPr lang="en-US" dirty="0"/>
+          </a:p>
+          <a:p>
+            <a:r>
+              <a:rPr lang="en-US" dirty="0"/>
+              <a:t>Cuando </a:t>
+            </a:r>
+            <a:r>
+              <a:rPr lang="en-US" dirty="0" err="1"/>
+              <a:t>usamos</a:t>
+            </a:r>
+            <a:r>
+              <a:rPr lang="en-US" dirty="0"/>
+              <a:t> </a:t>
+            </a:r>
+            <a:r>
+              <a:rPr lang="en-US" dirty="0" err="1"/>
+              <a:t>inteligencia</a:t>
+            </a:r>
+            <a:r>
+              <a:rPr lang="en-US" dirty="0"/>
+              <a:t> artificial, </a:t>
+            </a:r>
+            <a:r>
+              <a:rPr lang="en-US" dirty="0" err="1"/>
+              <a:t>aparece</a:t>
+            </a:r>
+            <a:r>
+              <a:rPr lang="en-US" dirty="0"/>
+              <a:t> </a:t>
+            </a:r>
+            <a:r>
+              <a:rPr lang="en-US" dirty="0" err="1"/>
+              <a:t>otro</a:t>
+            </a:r>
+            <a:r>
+              <a:rPr lang="en-US" dirty="0"/>
+              <a:t> </a:t>
+            </a:r>
+            <a:r>
+              <a:rPr lang="en-US" dirty="0" err="1"/>
+              <a:t>problema</a:t>
+            </a:r>
+            <a:r>
+              <a:rPr lang="en-US" dirty="0"/>
+              <a:t>: la </a:t>
+            </a:r>
+            <a:r>
+              <a:rPr lang="en-US" b="1" dirty="0" err="1"/>
+              <a:t>caja</a:t>
+            </a:r>
+            <a:r>
+              <a:rPr lang="en-US" b="1" dirty="0"/>
+              <a:t> </a:t>
+            </a:r>
+            <a:r>
+              <a:rPr lang="en-US" b="1" dirty="0" err="1"/>
+              <a:t>negra</a:t>
+            </a:r>
+            <a:r>
+              <a:rPr lang="en-US" dirty="0"/>
+              <a:t>. Un </a:t>
+            </a:r>
+            <a:r>
+              <a:rPr lang="en-US" dirty="0" err="1"/>
+              <a:t>porcentaje</a:t>
+            </a:r>
+            <a:r>
+              <a:rPr lang="en-US" dirty="0"/>
+              <a:t> sin </a:t>
+            </a:r>
+            <a:r>
+              <a:rPr lang="en-US" dirty="0" err="1"/>
+              <a:t>contexto</a:t>
+            </a:r>
+            <a:r>
+              <a:rPr lang="en-US" dirty="0"/>
+              <a:t> genera </a:t>
+            </a:r>
+            <a:r>
+              <a:rPr lang="en-US" dirty="0" err="1"/>
+              <a:t>desconfianza</a:t>
+            </a:r>
+            <a:r>
+              <a:rPr lang="en-US" dirty="0"/>
+              <a:t>. Por </a:t>
+            </a:r>
+            <a:r>
+              <a:rPr lang="en-US" dirty="0" err="1"/>
+              <a:t>eso</a:t>
+            </a:r>
+            <a:r>
+              <a:rPr lang="en-US" dirty="0"/>
+              <a:t> </a:t>
+            </a:r>
+            <a:r>
+              <a:rPr lang="en-US" dirty="0" err="1"/>
+              <a:t>este</a:t>
+            </a:r>
+            <a:r>
+              <a:rPr lang="en-US" dirty="0"/>
+              <a:t> </a:t>
+            </a:r>
+            <a:r>
+              <a:rPr lang="en-US" dirty="0" err="1"/>
+              <a:t>proyecto</a:t>
+            </a:r>
+            <a:r>
+              <a:rPr lang="en-US" dirty="0"/>
+              <a:t> no se </a:t>
+            </a:r>
+            <a:r>
+              <a:rPr lang="en-US" dirty="0" err="1"/>
+              <a:t>queda</a:t>
+            </a:r>
+            <a:r>
+              <a:rPr lang="en-US" dirty="0"/>
+              <a:t> </a:t>
+            </a:r>
+            <a:r>
+              <a:rPr lang="en-US" dirty="0" err="1"/>
+              <a:t>en</a:t>
+            </a:r>
+            <a:r>
+              <a:rPr lang="en-US" dirty="0"/>
+              <a:t> un </a:t>
+            </a:r>
+            <a:r>
+              <a:rPr lang="en-US" dirty="0" err="1"/>
+              <a:t>número</a:t>
+            </a:r>
+            <a:r>
+              <a:rPr lang="en-US" dirty="0"/>
+              <a:t>: </a:t>
+            </a:r>
+            <a:r>
+              <a:rPr lang="en-US" dirty="0" err="1"/>
+              <a:t>añade</a:t>
+            </a:r>
+            <a:r>
+              <a:rPr lang="en-US" dirty="0"/>
+              <a:t> </a:t>
+            </a:r>
+            <a:r>
+              <a:rPr lang="en-US" b="1" dirty="0" err="1"/>
+              <a:t>explicabilidad</a:t>
+            </a:r>
+            <a:r>
+              <a:rPr lang="en-US" dirty="0"/>
+              <a:t> con SHAP y </a:t>
+            </a:r>
+            <a:r>
+              <a:rPr lang="en-US" b="1" dirty="0" err="1"/>
+              <a:t>simulación</a:t>
+            </a:r>
+            <a:r>
+              <a:rPr lang="en-US" dirty="0"/>
+              <a:t> de </a:t>
+            </a:r>
+            <a:r>
+              <a:rPr lang="en-US" dirty="0" err="1"/>
+              <a:t>escenarios</a:t>
+            </a:r>
+            <a:r>
+              <a:rPr lang="en-US" dirty="0"/>
+              <a:t> </a:t>
+            </a:r>
+            <a:r>
+              <a:rPr lang="en-US" dirty="0" err="1"/>
+              <a:t>clínicos</a:t>
+            </a:r>
+            <a:r>
+              <a:rPr lang="en-US" dirty="0"/>
+              <a:t> </a:t>
+            </a:r>
+            <a:r>
+              <a:rPr lang="en-US" dirty="0" err="1"/>
+              <a:t>hipotéticos</a:t>
+            </a:r>
+            <a:r>
+              <a:rPr lang="en-US" dirty="0"/>
+              <a:t>.»</a:t>
+            </a:r>
+          </a:p>
+          <a:p>
+            <a:endParaRPr lang="en-US" dirty="0"/>
+          </a:p>
+        </p:txBody>
+      </p:sp>
+      <p:sp>
+        <p:nvSpPr>
+          <p:cNvPr id="4" name="Slide Number Placeholder 3"/>
+          <p:cNvSpPr>
+            <a:spLocks noGrp="1"/>
+          </p:cNvSpPr>
+          <p:nvPr>
+            <p:ph type="sldNum" sz="quarter" idx="5"/>
+          </p:nvPr>
+        </p:nvSpPr>
+        <p:spPr/>
+        <p:txBody>
+          <a:bodyPr/>
+          <a:lstStyle/>
+          <a:p>
+            <a:fld id="{12BC5CD0-964A-412E-BAD3-D4ECB486B5E6}" type="slidenum">
+              <a:rPr lang="en-US" smtClean="0"/>
+              <a:t>2</a:t>
+            </a:fld>
+            <a:endParaRPr lang="en-US"/>
+          </a:p>
+        </p:txBody>
+      </p:sp>
+    </p:spTree>
+    <p:extLst>
+      <p:ext uri="{BB962C8B-B14F-4D97-AF65-F5344CB8AC3E}">
+        <p14:creationId xmlns:p14="http://schemas.microsoft.com/office/powerpoint/2010/main" val="1839224878"/>
+      </p:ext>
+    </p:extLst>
+  </p:cSld>
+  <p:clrMapOvr>
+    <a:masterClrMapping/>
+  </p:clrMapOvr>
+</p:notes>
+</file>
+
+<file path=ppt/notesSlides/notesSlide3.xml><?xml version="1.0" encoding="utf-8"?>
+<p:notes xmlns:a="http://schemas.openxmlformats.org/drawingml/2006/main" xmlns:r="http://schemas.openxmlformats.org/officeDocument/2006/relationships" xmlns:p="http://schemas.openxmlformats.org/presentationml/2006/main">
+  <p:cSld>
+    <p:spTree>
+      <p:nvGrpSpPr>
+        <p:cNvPr id="1" name=""/>
+        <p:cNvGrpSpPr/>
+        <p:nvPr/>
+      </p:nvGrpSpPr>
+      <p:grpSpPr>
+        <a:xfrm>
+          <a:off x="0" y="0"/>
+          <a:ext cx="0" cy="0"/>
+          <a:chOff x="0" y="0"/>
+          <a:chExt cx="0" cy="0"/>
+        </a:xfrm>
+      </p:grpSpPr>
+      <p:sp>
+        <p:nvSpPr>
+          <p:cNvPr id="2" name="Slide Image Placeholder 1"/>
+          <p:cNvSpPr>
+            <a:spLocks noGrp="1" noRot="1" noChangeAspect="1"/>
+          </p:cNvSpPr>
+          <p:nvPr>
+            <p:ph type="sldImg"/>
+          </p:nvPr>
+        </p:nvSpPr>
+        <p:spPr/>
+      </p:sp>
+      <p:sp>
+        <p:nvSpPr>
+          <p:cNvPr id="3" name="Notes Placeholder 2"/>
+          <p:cNvSpPr>
+            <a:spLocks noGrp="1"/>
+          </p:cNvSpPr>
+          <p:nvPr>
+            <p:ph type="body" idx="1"/>
+          </p:nvPr>
+        </p:nvSpPr>
+        <p:spPr/>
+        <p:txBody>
+          <a:bodyPr/>
+          <a:lstStyle/>
+          <a:p>
+            <a:r>
+              <a:rPr lang="en-US" dirty="0"/>
+              <a:t>«</a:t>
+            </a:r>
+            <a:r>
+              <a:rPr lang="en-US" dirty="0" err="1"/>
+              <a:t>MedScope</a:t>
+            </a:r>
+            <a:r>
+              <a:rPr lang="en-US" dirty="0"/>
+              <a:t> AI es </a:t>
+            </a:r>
+            <a:r>
+              <a:rPr lang="en-US" dirty="0" err="1"/>
+              <a:t>una</a:t>
+            </a:r>
+            <a:r>
+              <a:rPr lang="en-US" dirty="0"/>
+              <a:t> </a:t>
+            </a:r>
+            <a:r>
+              <a:rPr lang="en-US" dirty="0" err="1"/>
+              <a:t>plataforma</a:t>
+            </a:r>
+            <a:r>
+              <a:rPr lang="en-US" dirty="0"/>
+              <a:t> web </a:t>
+            </a:r>
+            <a:r>
+              <a:rPr lang="en-US" dirty="0" err="1"/>
+              <a:t>que</a:t>
+            </a:r>
+            <a:r>
+              <a:rPr lang="en-US" dirty="0"/>
+              <a:t> integra cuatro </a:t>
+            </a:r>
+            <a:r>
+              <a:rPr lang="en-US" dirty="0" err="1"/>
+              <a:t>piezas</a:t>
+            </a:r>
+            <a:r>
+              <a:rPr lang="en-US" dirty="0"/>
+              <a:t> </a:t>
+            </a:r>
+            <a:r>
+              <a:rPr lang="en-US" dirty="0" err="1"/>
+              <a:t>en</a:t>
+            </a:r>
+            <a:r>
+              <a:rPr lang="en-US" dirty="0"/>
+              <a:t> un solo </a:t>
+            </a:r>
+            <a:r>
+              <a:rPr lang="en-US" dirty="0" err="1"/>
+              <a:t>flujo</a:t>
+            </a:r>
+            <a:r>
+              <a:rPr lang="en-US" dirty="0"/>
+              <a:t> de </a:t>
+            </a:r>
+            <a:r>
+              <a:rPr lang="en-US" dirty="0" err="1"/>
+              <a:t>trabajo</a:t>
+            </a:r>
+            <a:r>
+              <a:rPr lang="en-US" dirty="0"/>
+              <a:t>.</a:t>
+            </a:r>
+          </a:p>
+          <a:p>
+            <a:endParaRPr lang="en-US" dirty="0"/>
+          </a:p>
+          <a:p>
+            <a:r>
+              <a:rPr lang="en-US" dirty="0"/>
+              <a:t>Primero: </a:t>
+            </a:r>
+            <a:r>
+              <a:rPr lang="en-US" b="1" dirty="0" err="1"/>
+              <a:t>predicción</a:t>
+            </a:r>
+            <a:r>
+              <a:rPr lang="en-US" dirty="0"/>
+              <a:t> del </a:t>
+            </a:r>
+            <a:r>
+              <a:rPr lang="en-US" dirty="0" err="1"/>
+              <a:t>riesgo</a:t>
+            </a:r>
+            <a:r>
+              <a:rPr lang="en-US" dirty="0"/>
+              <a:t> de </a:t>
+            </a:r>
+            <a:r>
+              <a:rPr lang="en-US" dirty="0" err="1"/>
+              <a:t>readmisión</a:t>
+            </a:r>
+            <a:r>
+              <a:rPr lang="en-US" dirty="0"/>
+              <a:t> a </a:t>
+            </a:r>
+            <a:r>
+              <a:rPr lang="en-US" dirty="0" err="1"/>
+              <a:t>treinta</a:t>
+            </a:r>
+            <a:r>
+              <a:rPr lang="en-US" dirty="0"/>
+              <a:t> días, </a:t>
+            </a:r>
+            <a:r>
+              <a:rPr lang="en-US" dirty="0" err="1"/>
+              <a:t>usando</a:t>
+            </a:r>
+            <a:r>
+              <a:rPr lang="en-US" dirty="0"/>
+              <a:t> un </a:t>
+            </a:r>
+            <a:r>
+              <a:rPr lang="en-US" dirty="0" err="1"/>
+              <a:t>modelo</a:t>
+            </a:r>
+            <a:r>
+              <a:rPr lang="en-US" dirty="0"/>
+              <a:t> </a:t>
+            </a:r>
+            <a:r>
+              <a:rPr lang="en-US" dirty="0" err="1"/>
+              <a:t>entrenado</a:t>
+            </a:r>
+            <a:r>
+              <a:rPr lang="en-US" dirty="0"/>
+              <a:t> con </a:t>
+            </a:r>
+            <a:r>
+              <a:rPr lang="en-US" dirty="0" err="1"/>
+              <a:t>datos</a:t>
+            </a:r>
+            <a:r>
+              <a:rPr lang="en-US" dirty="0"/>
+              <a:t> </a:t>
+            </a:r>
+            <a:r>
+              <a:rPr lang="en-US" dirty="0" err="1"/>
+              <a:t>clínicos</a:t>
+            </a:r>
+            <a:r>
+              <a:rPr lang="en-US" dirty="0"/>
+              <a:t> </a:t>
+            </a:r>
+            <a:r>
+              <a:rPr lang="en-US" dirty="0" err="1"/>
+              <a:t>tabulares</a:t>
+            </a:r>
+            <a:r>
+              <a:rPr lang="en-US" dirty="0"/>
+              <a:t> del dataset </a:t>
+            </a:r>
+            <a:r>
+              <a:rPr lang="en-US" dirty="0" err="1"/>
+              <a:t>público</a:t>
+            </a:r>
+            <a:r>
+              <a:rPr lang="en-US" dirty="0"/>
+              <a:t> UCI de diabetes.</a:t>
+            </a:r>
+          </a:p>
+          <a:p>
+            <a:endParaRPr lang="en-US" dirty="0"/>
+          </a:p>
+          <a:p>
+            <a:r>
+              <a:rPr lang="en-US" dirty="0"/>
+              <a:t>Segundo: </a:t>
+            </a:r>
+            <a:r>
+              <a:rPr lang="en-US" b="1" dirty="0" err="1"/>
+              <a:t>explicabilidad</a:t>
+            </a:r>
+            <a:r>
+              <a:rPr lang="en-US" dirty="0"/>
+              <a:t> — </a:t>
+            </a:r>
+            <a:r>
+              <a:rPr lang="en-US" dirty="0" err="1"/>
+              <a:t>el</a:t>
+            </a:r>
+            <a:r>
+              <a:rPr lang="en-US" dirty="0"/>
+              <a:t> </a:t>
+            </a:r>
+            <a:r>
+              <a:rPr lang="en-US" dirty="0" err="1"/>
+              <a:t>clínico</a:t>
+            </a:r>
+            <a:r>
+              <a:rPr lang="en-US" dirty="0"/>
+              <a:t> </a:t>
+            </a:r>
+            <a:r>
+              <a:rPr lang="en-US" dirty="0" err="1"/>
+              <a:t>ve</a:t>
+            </a:r>
+            <a:r>
+              <a:rPr lang="en-US" dirty="0"/>
+              <a:t> </a:t>
+            </a:r>
+            <a:r>
+              <a:rPr lang="en-US" dirty="0" err="1"/>
+              <a:t>qué</a:t>
+            </a:r>
+            <a:r>
+              <a:rPr lang="en-US" dirty="0"/>
+              <a:t> variables </a:t>
+            </a:r>
+            <a:r>
+              <a:rPr lang="en-US" dirty="0" err="1"/>
+              <a:t>empujan</a:t>
+            </a:r>
+            <a:r>
+              <a:rPr lang="en-US" dirty="0"/>
+              <a:t> </a:t>
+            </a:r>
+            <a:r>
+              <a:rPr lang="en-US" dirty="0" err="1"/>
+              <a:t>el</a:t>
+            </a:r>
+            <a:r>
+              <a:rPr lang="en-US" dirty="0"/>
+              <a:t> </a:t>
+            </a:r>
+            <a:r>
+              <a:rPr lang="en-US" dirty="0" err="1"/>
+              <a:t>riesgo</a:t>
+            </a:r>
+            <a:r>
+              <a:rPr lang="en-US" dirty="0"/>
+              <a:t> </a:t>
+            </a:r>
+            <a:r>
+              <a:rPr lang="en-US" dirty="0" err="1"/>
+              <a:t>hacia</a:t>
+            </a:r>
+            <a:r>
+              <a:rPr lang="en-US" dirty="0"/>
+              <a:t> </a:t>
+            </a:r>
+            <a:r>
+              <a:rPr lang="en-US" dirty="0" err="1"/>
+              <a:t>arriba</a:t>
+            </a:r>
+            <a:r>
+              <a:rPr lang="en-US" dirty="0"/>
+              <a:t> o </a:t>
+            </a:r>
+            <a:r>
+              <a:rPr lang="en-US" dirty="0" err="1"/>
+              <a:t>hacia</a:t>
+            </a:r>
+            <a:r>
+              <a:rPr lang="en-US" dirty="0"/>
+              <a:t> </a:t>
+            </a:r>
+            <a:r>
+              <a:rPr lang="en-US" dirty="0" err="1"/>
+              <a:t>abajo</a:t>
+            </a:r>
+            <a:r>
+              <a:rPr lang="en-US" dirty="0"/>
+              <a:t>.</a:t>
+            </a:r>
+          </a:p>
+          <a:p>
+            <a:endParaRPr lang="en-US" dirty="0"/>
+          </a:p>
+          <a:p>
+            <a:r>
+              <a:rPr lang="en-US" dirty="0"/>
+              <a:t>Tercero: </a:t>
+            </a:r>
+            <a:r>
+              <a:rPr lang="en-US" b="1" dirty="0" err="1"/>
+              <a:t>simulación</a:t>
+            </a:r>
+            <a:r>
+              <a:rPr lang="en-US" b="1" dirty="0"/>
+              <a:t> what-if</a:t>
+            </a:r>
+            <a:r>
+              <a:rPr lang="en-US" dirty="0"/>
+              <a:t> — </a:t>
+            </a:r>
+            <a:r>
+              <a:rPr lang="en-US" dirty="0" err="1"/>
+              <a:t>podemos</a:t>
+            </a:r>
+            <a:r>
+              <a:rPr lang="en-US" dirty="0"/>
+              <a:t> </a:t>
+            </a:r>
+            <a:r>
+              <a:rPr lang="en-US" dirty="0" err="1"/>
+              <a:t>preguntar</a:t>
+            </a:r>
+            <a:r>
+              <a:rPr lang="en-US" dirty="0"/>
+              <a:t>: “</a:t>
+            </a:r>
+            <a:r>
+              <a:rPr lang="en-US" dirty="0" err="1"/>
+              <a:t>si</a:t>
+            </a:r>
+            <a:r>
+              <a:rPr lang="en-US" dirty="0"/>
+              <a:t> </a:t>
+            </a:r>
+            <a:r>
+              <a:rPr lang="en-US" dirty="0" err="1"/>
+              <a:t>mejoramos</a:t>
+            </a:r>
+            <a:r>
+              <a:rPr lang="en-US" dirty="0"/>
+              <a:t> </a:t>
+            </a:r>
+            <a:r>
+              <a:rPr lang="en-US" dirty="0" err="1"/>
+              <a:t>el</a:t>
+            </a:r>
+            <a:r>
+              <a:rPr lang="en-US" dirty="0"/>
+              <a:t> control </a:t>
+            </a:r>
+            <a:r>
+              <a:rPr lang="en-US" dirty="0" err="1"/>
+              <a:t>glucémico</a:t>
+            </a:r>
+            <a:r>
+              <a:rPr lang="en-US" dirty="0"/>
+              <a:t> o </a:t>
+            </a:r>
+            <a:r>
+              <a:rPr lang="en-US" dirty="0" err="1"/>
+              <a:t>reducimos</a:t>
+            </a:r>
+            <a:r>
+              <a:rPr lang="en-US" dirty="0"/>
+              <a:t> las </a:t>
+            </a:r>
+            <a:r>
+              <a:rPr lang="en-US" dirty="0" err="1"/>
+              <a:t>admisiones</a:t>
+            </a:r>
+            <a:r>
+              <a:rPr lang="en-US" dirty="0"/>
+              <a:t> previas, ¿</a:t>
+            </a:r>
+            <a:r>
+              <a:rPr lang="en-US" dirty="0" err="1"/>
+              <a:t>cómo</a:t>
+            </a:r>
+            <a:r>
+              <a:rPr lang="en-US" dirty="0"/>
+              <a:t> cambia </a:t>
+            </a:r>
+            <a:r>
+              <a:rPr lang="en-US" dirty="0" err="1"/>
+              <a:t>el</a:t>
+            </a:r>
+            <a:r>
+              <a:rPr lang="en-US" dirty="0"/>
+              <a:t> </a:t>
+            </a:r>
+            <a:r>
+              <a:rPr lang="en-US" dirty="0" err="1"/>
+              <a:t>riesgo</a:t>
+            </a:r>
+            <a:r>
+              <a:rPr lang="en-US" dirty="0"/>
+              <a:t>?”</a:t>
+            </a:r>
+          </a:p>
+          <a:p>
+            <a:endParaRPr lang="en-US" dirty="0"/>
+          </a:p>
+          <a:p>
+            <a:r>
+              <a:rPr lang="en-US" dirty="0"/>
+              <a:t>Y </a:t>
+            </a:r>
+            <a:r>
+              <a:rPr lang="en-US" dirty="0" err="1"/>
+              <a:t>cuarto</a:t>
+            </a:r>
+            <a:r>
+              <a:rPr lang="en-US" dirty="0"/>
+              <a:t>: </a:t>
+            </a:r>
+            <a:r>
+              <a:rPr lang="en-US" b="1" dirty="0" err="1"/>
+              <a:t>persistencia</a:t>
+            </a:r>
+            <a:r>
+              <a:rPr lang="en-US" b="1" dirty="0"/>
+              <a:t> e </a:t>
+            </a:r>
+            <a:r>
+              <a:rPr lang="en-US" b="1" dirty="0" err="1"/>
+              <a:t>historial</a:t>
+            </a:r>
+            <a:r>
+              <a:rPr lang="en-US" dirty="0"/>
+              <a:t> — </a:t>
+            </a:r>
+            <a:r>
+              <a:rPr lang="en-US" dirty="0" err="1"/>
+              <a:t>cada</a:t>
+            </a:r>
+            <a:r>
+              <a:rPr lang="en-US" dirty="0"/>
+              <a:t> </a:t>
+            </a:r>
+            <a:r>
+              <a:rPr lang="en-US" dirty="0" err="1"/>
+              <a:t>evaluación</a:t>
+            </a:r>
+            <a:r>
+              <a:rPr lang="en-US" dirty="0"/>
+              <a:t> </a:t>
+            </a:r>
+            <a:r>
+              <a:rPr lang="en-US" dirty="0" err="1"/>
+              <a:t>queda</a:t>
+            </a:r>
+            <a:r>
+              <a:rPr lang="en-US" dirty="0"/>
+              <a:t> </a:t>
+            </a:r>
+            <a:r>
+              <a:rPr lang="en-US" dirty="0" err="1"/>
+              <a:t>registrada</a:t>
+            </a:r>
+            <a:r>
+              <a:rPr lang="en-US" dirty="0"/>
+              <a:t> para consulta y </a:t>
+            </a:r>
+            <a:r>
+              <a:rPr lang="en-US" dirty="0" err="1"/>
+              <a:t>analítica</a:t>
+            </a:r>
+            <a:r>
+              <a:rPr lang="en-US" dirty="0"/>
+              <a:t> posterior.»</a:t>
+            </a:r>
+          </a:p>
+          <a:p>
+            <a:endParaRPr lang="en-US" dirty="0"/>
+          </a:p>
+        </p:txBody>
+      </p:sp>
+      <p:sp>
+        <p:nvSpPr>
+          <p:cNvPr id="4" name="Slide Number Placeholder 3"/>
+          <p:cNvSpPr>
+            <a:spLocks noGrp="1"/>
+          </p:cNvSpPr>
+          <p:nvPr>
+            <p:ph type="sldNum" sz="quarter" idx="5"/>
+          </p:nvPr>
+        </p:nvSpPr>
+        <p:spPr/>
+        <p:txBody>
+          <a:bodyPr/>
+          <a:lstStyle/>
+          <a:p>
+            <a:fld id="{12BC5CD0-964A-412E-BAD3-D4ECB486B5E6}" type="slidenum">
+              <a:rPr lang="en-US" smtClean="0"/>
+              <a:t>3</a:t>
+            </a:fld>
+            <a:endParaRPr lang="en-US"/>
+          </a:p>
+        </p:txBody>
+      </p:sp>
+    </p:spTree>
+    <p:extLst>
+      <p:ext uri="{BB962C8B-B14F-4D97-AF65-F5344CB8AC3E}">
+        <p14:creationId xmlns:p14="http://schemas.microsoft.com/office/powerpoint/2010/main" val="3666678015"/>
+      </p:ext>
+    </p:extLst>
+  </p:cSld>
+  <p:clrMapOvr>
+    <a:masterClrMapping/>
+  </p:clrMapOvr>
+</p:notes>
+</file>
+
+<file path=ppt/notesSlides/notesSlide4.xml><?xml version="1.0" encoding="utf-8"?>
+<p:notes xmlns:a="http://schemas.openxmlformats.org/drawingml/2006/main" xmlns:r="http://schemas.openxmlformats.org/officeDocument/2006/relationships" xmlns:p="http://schemas.openxmlformats.org/presentationml/2006/main">
+  <p:cSld>
+    <p:spTree>
+      <p:nvGrpSpPr>
+        <p:cNvPr id="1" name=""/>
+        <p:cNvGrpSpPr/>
+        <p:nvPr/>
+      </p:nvGrpSpPr>
+      <p:grpSpPr>
+        <a:xfrm>
+          <a:off x="0" y="0"/>
+          <a:ext cx="0" cy="0"/>
+          <a:chOff x="0" y="0"/>
+          <a:chExt cx="0" cy="0"/>
+        </a:xfrm>
+      </p:grpSpPr>
+      <p:sp>
+        <p:nvSpPr>
+          <p:cNvPr id="2" name="Slide Image Placeholder 1"/>
+          <p:cNvSpPr>
+            <a:spLocks noGrp="1" noRot="1" noChangeAspect="1"/>
+          </p:cNvSpPr>
+          <p:nvPr>
+            <p:ph type="sldImg"/>
+          </p:nvPr>
+        </p:nvSpPr>
+        <p:spPr/>
+      </p:sp>
+      <p:sp>
+        <p:nvSpPr>
+          <p:cNvPr id="3" name="Notes Placeholder 2"/>
+          <p:cNvSpPr>
+            <a:spLocks noGrp="1"/>
+          </p:cNvSpPr>
+          <p:nvPr>
+            <p:ph type="body" idx="1"/>
+          </p:nvPr>
+        </p:nvSpPr>
+        <p:spPr/>
+        <p:txBody>
+          <a:bodyPr/>
+          <a:lstStyle/>
+          <a:p>
+            <a:r>
+              <a:rPr lang="en-US" dirty="0"/>
+              <a:t>«Los </a:t>
+            </a:r>
+            <a:r>
+              <a:rPr lang="en-US" dirty="0" err="1"/>
+              <a:t>objetivos</a:t>
+            </a:r>
+            <a:r>
+              <a:rPr lang="en-US" dirty="0"/>
+              <a:t> del </a:t>
+            </a:r>
+            <a:r>
+              <a:rPr lang="en-US" dirty="0" err="1"/>
+              <a:t>proyecto</a:t>
+            </a:r>
+            <a:r>
+              <a:rPr lang="en-US" dirty="0"/>
+              <a:t> </a:t>
+            </a:r>
+            <a:r>
+              <a:rPr lang="en-US" dirty="0" err="1"/>
+              <a:t>han</a:t>
+            </a:r>
+            <a:r>
+              <a:rPr lang="en-US" dirty="0"/>
+              <a:t> </a:t>
+            </a:r>
+            <a:r>
+              <a:rPr lang="en-US" dirty="0" err="1"/>
+              <a:t>sido</a:t>
+            </a:r>
+            <a:r>
+              <a:rPr lang="en-US" dirty="0"/>
+              <a:t>, </a:t>
+            </a:r>
+            <a:r>
+              <a:rPr lang="en-US" dirty="0" err="1"/>
+              <a:t>en</a:t>
+            </a:r>
+            <a:r>
+              <a:rPr lang="en-US" dirty="0"/>
+              <a:t> </a:t>
+            </a:r>
+            <a:r>
+              <a:rPr lang="en-US" dirty="0" err="1"/>
+              <a:t>resumen</a:t>
+            </a:r>
+            <a:r>
+              <a:rPr lang="en-US" dirty="0"/>
+              <a:t>: </a:t>
+            </a:r>
+            <a:r>
+              <a:rPr lang="en-US" dirty="0" err="1"/>
+              <a:t>construir</a:t>
+            </a:r>
+            <a:r>
+              <a:rPr lang="en-US" dirty="0"/>
+              <a:t> un pipeline de machine learning </a:t>
+            </a:r>
+            <a:r>
+              <a:rPr lang="en-US" b="1" dirty="0"/>
+              <a:t>reproducible</a:t>
+            </a:r>
+            <a:r>
+              <a:rPr lang="en-US" dirty="0"/>
+              <a:t>; </a:t>
+            </a:r>
+            <a:r>
+              <a:rPr lang="en-US" dirty="0" err="1"/>
+              <a:t>integrarlo</a:t>
+            </a:r>
+            <a:r>
+              <a:rPr lang="en-US" dirty="0"/>
+              <a:t> </a:t>
+            </a:r>
+            <a:r>
+              <a:rPr lang="en-US" dirty="0" err="1"/>
+              <a:t>en</a:t>
+            </a:r>
+            <a:r>
+              <a:rPr lang="en-US" dirty="0"/>
+              <a:t> </a:t>
+            </a:r>
+            <a:r>
+              <a:rPr lang="en-US" dirty="0" err="1"/>
+              <a:t>una</a:t>
+            </a:r>
+            <a:r>
+              <a:rPr lang="en-US" dirty="0"/>
+              <a:t> API </a:t>
+            </a:r>
+            <a:r>
+              <a:rPr lang="en-US" dirty="0" err="1"/>
+              <a:t>segura</a:t>
+            </a:r>
+            <a:r>
+              <a:rPr lang="en-US" dirty="0"/>
+              <a:t> con </a:t>
+            </a:r>
+            <a:r>
+              <a:rPr lang="en-US" dirty="0" err="1"/>
+              <a:t>autenticación</a:t>
+            </a:r>
+            <a:r>
+              <a:rPr lang="en-US" dirty="0"/>
+              <a:t> y roles; </a:t>
+            </a:r>
+            <a:r>
+              <a:rPr lang="en-US" dirty="0" err="1"/>
+              <a:t>desarrollar</a:t>
+            </a:r>
+            <a:r>
+              <a:rPr lang="en-US" dirty="0"/>
+              <a:t> </a:t>
+            </a:r>
+            <a:r>
+              <a:rPr lang="en-US" dirty="0" err="1"/>
+              <a:t>una</a:t>
+            </a:r>
+            <a:r>
+              <a:rPr lang="en-US" dirty="0"/>
+              <a:t> </a:t>
+            </a:r>
+            <a:r>
+              <a:rPr lang="en-US" dirty="0" err="1"/>
+              <a:t>interfaz</a:t>
+            </a:r>
+            <a:r>
+              <a:rPr lang="en-US" dirty="0"/>
+              <a:t> </a:t>
+            </a:r>
+            <a:r>
+              <a:rPr lang="en-US" dirty="0" err="1"/>
+              <a:t>clínica</a:t>
+            </a:r>
+            <a:r>
+              <a:rPr lang="en-US" dirty="0"/>
+              <a:t> </a:t>
+            </a:r>
+            <a:r>
+              <a:rPr lang="en-US" dirty="0" err="1"/>
+              <a:t>profesional</a:t>
+            </a:r>
+            <a:r>
+              <a:rPr lang="en-US" dirty="0"/>
+              <a:t>; </a:t>
+            </a:r>
+            <a:r>
+              <a:rPr lang="en-US" dirty="0" err="1"/>
+              <a:t>persistir</a:t>
+            </a:r>
+            <a:r>
+              <a:rPr lang="en-US" dirty="0"/>
+              <a:t> </a:t>
+            </a:r>
+            <a:r>
+              <a:rPr lang="en-US" dirty="0" err="1"/>
+              <a:t>los</a:t>
+            </a:r>
+            <a:r>
+              <a:rPr lang="en-US" dirty="0"/>
+              <a:t> </a:t>
+            </a:r>
+            <a:r>
+              <a:rPr lang="en-US" dirty="0" err="1"/>
+              <a:t>resultados</a:t>
+            </a:r>
+            <a:r>
+              <a:rPr lang="en-US" dirty="0"/>
+              <a:t> </a:t>
+            </a:r>
+            <a:r>
+              <a:rPr lang="en-US" dirty="0" err="1"/>
+              <a:t>en</a:t>
+            </a:r>
+            <a:r>
+              <a:rPr lang="en-US" dirty="0"/>
+              <a:t> PostgreSQL; y </a:t>
+            </a:r>
+            <a:r>
+              <a:rPr lang="en-US" dirty="0" err="1"/>
+              <a:t>desplegar</a:t>
+            </a:r>
+            <a:r>
+              <a:rPr lang="en-US" dirty="0"/>
+              <a:t> </a:t>
+            </a:r>
+            <a:r>
+              <a:rPr lang="en-US" dirty="0" err="1"/>
+              <a:t>el</a:t>
+            </a:r>
+            <a:r>
+              <a:rPr lang="en-US" dirty="0"/>
+              <a:t> </a:t>
+            </a:r>
+            <a:r>
+              <a:rPr lang="en-US" dirty="0" err="1"/>
+              <a:t>sistema</a:t>
+            </a:r>
+            <a:r>
+              <a:rPr lang="en-US" dirty="0"/>
+              <a:t> </a:t>
+            </a:r>
+            <a:r>
+              <a:rPr lang="en-US" dirty="0" err="1"/>
+              <a:t>en</a:t>
+            </a:r>
+            <a:r>
+              <a:rPr lang="en-US" dirty="0"/>
+              <a:t> </a:t>
+            </a:r>
+            <a:r>
+              <a:rPr lang="en-US" b="1" dirty="0" err="1"/>
+              <a:t>producción</a:t>
+            </a:r>
+            <a:r>
+              <a:rPr lang="en-US" b="1" dirty="0"/>
+              <a:t> real</a:t>
+            </a:r>
+            <a:r>
+              <a:rPr lang="en-US" dirty="0"/>
+              <a:t>, no solo </a:t>
+            </a:r>
+            <a:r>
+              <a:rPr lang="en-US" dirty="0" err="1"/>
+              <a:t>en</a:t>
+            </a:r>
+            <a:r>
+              <a:rPr lang="en-US" dirty="0"/>
+              <a:t> local.</a:t>
+            </a:r>
+          </a:p>
+          <a:p>
+            <a:endParaRPr lang="en-US" dirty="0"/>
+          </a:p>
+          <a:p>
+            <a:r>
+              <a:rPr lang="en-US" dirty="0"/>
+              <a:t>Todo </a:t>
+            </a:r>
+            <a:r>
+              <a:rPr lang="en-US" dirty="0" err="1"/>
+              <a:t>el</a:t>
+            </a:r>
+            <a:r>
+              <a:rPr lang="en-US" dirty="0"/>
+              <a:t> </a:t>
+            </a:r>
+            <a:r>
+              <a:rPr lang="en-US" dirty="0" err="1"/>
+              <a:t>código</a:t>
+            </a:r>
+            <a:r>
+              <a:rPr lang="en-US" dirty="0"/>
+              <a:t> </a:t>
+            </a:r>
+            <a:r>
+              <a:rPr lang="en-US" dirty="0" err="1"/>
+              <a:t>vive</a:t>
+            </a:r>
+            <a:r>
+              <a:rPr lang="en-US" dirty="0"/>
+              <a:t> </a:t>
+            </a:r>
+            <a:r>
+              <a:rPr lang="en-US" dirty="0" err="1"/>
+              <a:t>en</a:t>
+            </a:r>
+            <a:r>
+              <a:rPr lang="en-US" dirty="0"/>
+              <a:t> un </a:t>
+            </a:r>
+            <a:r>
+              <a:rPr lang="en-US" dirty="0" err="1"/>
+              <a:t>único</a:t>
+            </a:r>
+            <a:r>
+              <a:rPr lang="en-US" dirty="0"/>
+              <a:t> </a:t>
+            </a:r>
+            <a:r>
+              <a:rPr lang="en-US" dirty="0" err="1"/>
+              <a:t>repositorio</a:t>
+            </a:r>
+            <a:r>
+              <a:rPr lang="en-US" dirty="0"/>
+              <a:t> modular: frontend, backend y machine learning, sin </a:t>
+            </a:r>
+            <a:r>
+              <a:rPr lang="en-US" dirty="0" err="1"/>
+              <a:t>microservicios</a:t>
+            </a:r>
+            <a:r>
+              <a:rPr lang="en-US" dirty="0"/>
+              <a:t>, </a:t>
+            </a:r>
+            <a:r>
+              <a:rPr lang="en-US" dirty="0" err="1"/>
+              <a:t>priorizando</a:t>
+            </a:r>
+            <a:r>
+              <a:rPr lang="en-US" dirty="0"/>
+              <a:t> la </a:t>
+            </a:r>
+            <a:r>
+              <a:rPr lang="en-US" dirty="0" err="1"/>
+              <a:t>claridad</a:t>
+            </a:r>
+            <a:r>
+              <a:rPr lang="en-US" dirty="0"/>
+              <a:t> y </a:t>
+            </a:r>
+            <a:r>
+              <a:rPr lang="en-US" dirty="0" err="1"/>
+              <a:t>el</a:t>
+            </a:r>
+            <a:r>
+              <a:rPr lang="en-US" dirty="0"/>
+              <a:t> </a:t>
+            </a:r>
+            <a:r>
+              <a:rPr lang="en-US" dirty="0" err="1"/>
+              <a:t>mantenimiento</a:t>
+            </a:r>
+            <a:r>
+              <a:rPr lang="en-US" dirty="0"/>
+              <a:t>.»</a:t>
+            </a:r>
+          </a:p>
+          <a:p>
+            <a:endParaRPr lang="en-US" dirty="0"/>
+          </a:p>
+        </p:txBody>
+      </p:sp>
+      <p:sp>
+        <p:nvSpPr>
+          <p:cNvPr id="4" name="Slide Number Placeholder 3"/>
+          <p:cNvSpPr>
+            <a:spLocks noGrp="1"/>
+          </p:cNvSpPr>
+          <p:nvPr>
+            <p:ph type="sldNum" sz="quarter" idx="5"/>
+          </p:nvPr>
+        </p:nvSpPr>
+        <p:spPr/>
+        <p:txBody>
+          <a:bodyPr/>
+          <a:lstStyle/>
+          <a:p>
+            <a:fld id="{12BC5CD0-964A-412E-BAD3-D4ECB486B5E6}" type="slidenum">
+              <a:rPr lang="en-US" smtClean="0"/>
+              <a:t>4</a:t>
+            </a:fld>
+            <a:endParaRPr lang="en-US"/>
+          </a:p>
+        </p:txBody>
+      </p:sp>
+    </p:spTree>
+    <p:extLst>
+      <p:ext uri="{BB962C8B-B14F-4D97-AF65-F5344CB8AC3E}">
+        <p14:creationId xmlns:p14="http://schemas.microsoft.com/office/powerpoint/2010/main" val="2237447398"/>
+      </p:ext>
+    </p:extLst>
+  </p:cSld>
+  <p:clrMapOvr>
+    <a:masterClrMapping/>
+  </p:clrMapOvr>
+</p:notes>
+</file>
+
+<file path=ppt/notesSlides/notesSlide5.xml><?xml version="1.0" encoding="utf-8"?>
+<p:notes xmlns:a="http://schemas.openxmlformats.org/drawingml/2006/main" xmlns:r="http://schemas.openxmlformats.org/officeDocument/2006/relationships" xmlns:p="http://schemas.openxmlformats.org/presentationml/2006/main">
+  <p:cSld>
+    <p:spTree>
+      <p:nvGrpSpPr>
+        <p:cNvPr id="1" name=""/>
+        <p:cNvGrpSpPr/>
+        <p:nvPr/>
+      </p:nvGrpSpPr>
+      <p:grpSpPr>
+        <a:xfrm>
+          <a:off x="0" y="0"/>
+          <a:ext cx="0" cy="0"/>
+          <a:chOff x="0" y="0"/>
+          <a:chExt cx="0" cy="0"/>
+        </a:xfrm>
+      </p:grpSpPr>
+      <p:sp>
+        <p:nvSpPr>
+          <p:cNvPr id="2" name="Slide Image Placeholder 1"/>
+          <p:cNvSpPr>
+            <a:spLocks noGrp="1" noRot="1" noChangeAspect="1"/>
+          </p:cNvSpPr>
+          <p:nvPr>
+            <p:ph type="sldImg"/>
+          </p:nvPr>
+        </p:nvSpPr>
+        <p:spPr/>
+      </p:sp>
+      <p:sp>
+        <p:nvSpPr>
+          <p:cNvPr id="3" name="Notes Placeholder 2"/>
+          <p:cNvSpPr>
+            <a:spLocks noGrp="1"/>
+          </p:cNvSpPr>
+          <p:nvPr>
+            <p:ph type="body" idx="1"/>
+          </p:nvPr>
+        </p:nvSpPr>
+        <p:spPr/>
+        <p:txBody>
+          <a:bodyPr/>
+          <a:lstStyle/>
+          <a:p>
+            <a:r>
+              <a:rPr lang="en-US" dirty="0"/>
+              <a:t>«En </a:t>
+            </a:r>
+            <a:r>
+              <a:rPr lang="en-US" dirty="0" err="1"/>
+              <a:t>esta</a:t>
+            </a:r>
+            <a:r>
+              <a:rPr lang="en-US" dirty="0"/>
+              <a:t> </a:t>
+            </a:r>
+            <a:r>
+              <a:rPr lang="en-US" dirty="0" err="1"/>
+              <a:t>diapositiva</a:t>
+            </a:r>
+            <a:r>
+              <a:rPr lang="en-US" dirty="0"/>
+              <a:t> Podemos </a:t>
+            </a:r>
+            <a:r>
+              <a:rPr lang="en-US" dirty="0" err="1"/>
+              <a:t>ver</a:t>
+            </a:r>
+            <a:r>
+              <a:rPr lang="en-US" dirty="0"/>
+              <a:t> la </a:t>
+            </a:r>
+            <a:r>
+              <a:rPr lang="en-US" dirty="0" err="1"/>
+              <a:t>arquitectura</a:t>
+            </a:r>
+            <a:r>
+              <a:rPr lang="en-US" dirty="0"/>
+              <a:t> del </a:t>
+            </a:r>
+            <a:r>
+              <a:rPr lang="en-US" dirty="0" err="1"/>
+              <a:t>proyecto</a:t>
+            </a:r>
+            <a:r>
+              <a:rPr lang="en-US" dirty="0"/>
+              <a:t>. </a:t>
+            </a:r>
+          </a:p>
+          <a:p>
+            <a:endParaRPr lang="en-US" dirty="0"/>
+          </a:p>
+          <a:p>
+            <a:r>
+              <a:rPr lang="en-US" dirty="0"/>
+              <a:t>A la </a:t>
+            </a:r>
+            <a:r>
+              <a:rPr lang="en-US" dirty="0" err="1"/>
+              <a:t>izquierda</a:t>
+            </a:r>
+            <a:r>
+              <a:rPr lang="en-US" dirty="0"/>
+              <a:t>, </a:t>
+            </a:r>
+            <a:r>
+              <a:rPr lang="en-US" dirty="0" err="1"/>
+              <a:t>el</a:t>
+            </a:r>
+            <a:r>
+              <a:rPr lang="en-US" dirty="0"/>
+              <a:t> </a:t>
+            </a:r>
+            <a:r>
+              <a:rPr lang="en-US" dirty="0" err="1"/>
+              <a:t>navegador</a:t>
+            </a:r>
+            <a:r>
+              <a:rPr lang="en-US" dirty="0"/>
+              <a:t> con la </a:t>
+            </a:r>
+            <a:r>
+              <a:rPr lang="en-US" dirty="0" err="1"/>
+              <a:t>aplicación</a:t>
+            </a:r>
+            <a:r>
+              <a:rPr lang="en-US" dirty="0"/>
+              <a:t> React </a:t>
+            </a:r>
+            <a:r>
+              <a:rPr lang="en-US" dirty="0" err="1"/>
+              <a:t>desplegada</a:t>
+            </a:r>
+            <a:r>
+              <a:rPr lang="en-US" dirty="0"/>
+              <a:t> </a:t>
+            </a:r>
+            <a:r>
+              <a:rPr lang="en-US" dirty="0" err="1"/>
+              <a:t>en</a:t>
+            </a:r>
+            <a:r>
+              <a:rPr lang="en-US" dirty="0"/>
+              <a:t> </a:t>
+            </a:r>
+            <a:r>
+              <a:rPr lang="en-US" b="1" dirty="0" err="1"/>
+              <a:t>Vercel</a:t>
+            </a:r>
+            <a:r>
+              <a:rPr lang="en-US" dirty="0"/>
+              <a:t>. Las </a:t>
+            </a:r>
+            <a:r>
+              <a:rPr lang="en-US" dirty="0" err="1"/>
+              <a:t>peticiones</a:t>
+            </a:r>
+            <a:r>
+              <a:rPr lang="en-US" dirty="0"/>
+              <a:t> van </a:t>
+            </a:r>
+            <a:r>
+              <a:rPr lang="en-US" dirty="0" err="1"/>
+              <a:t>por</a:t>
+            </a:r>
+            <a:r>
+              <a:rPr lang="en-US" dirty="0"/>
+              <a:t> HTTPS al backend </a:t>
+            </a:r>
+            <a:r>
+              <a:rPr lang="en-US" b="1" dirty="0" err="1"/>
+              <a:t>FastAPI</a:t>
+            </a:r>
+            <a:r>
+              <a:rPr lang="en-US" dirty="0"/>
+              <a:t>, </a:t>
+            </a:r>
+            <a:r>
+              <a:rPr lang="en-US" dirty="0" err="1"/>
+              <a:t>que</a:t>
+            </a:r>
+            <a:r>
+              <a:rPr lang="en-US" dirty="0"/>
+              <a:t> </a:t>
+            </a:r>
+            <a:r>
+              <a:rPr lang="en-US" dirty="0" err="1"/>
+              <a:t>corre</a:t>
+            </a:r>
+            <a:r>
+              <a:rPr lang="en-US" dirty="0"/>
+              <a:t> </a:t>
+            </a:r>
+            <a:r>
+              <a:rPr lang="en-US" dirty="0" err="1"/>
+              <a:t>en</a:t>
+            </a:r>
+            <a:r>
+              <a:rPr lang="en-US" dirty="0"/>
+              <a:t> </a:t>
+            </a:r>
+            <a:r>
+              <a:rPr lang="en-US" b="1" dirty="0"/>
+              <a:t>Render</a:t>
+            </a:r>
+            <a:r>
+              <a:rPr lang="en-US" dirty="0"/>
+              <a:t> </a:t>
+            </a:r>
+            <a:r>
+              <a:rPr lang="en-US" dirty="0" err="1"/>
+              <a:t>dentro</a:t>
+            </a:r>
+            <a:r>
+              <a:rPr lang="en-US" dirty="0"/>
+              <a:t> de un </a:t>
+            </a:r>
+            <a:r>
+              <a:rPr lang="en-US" dirty="0" err="1"/>
+              <a:t>contenedor</a:t>
+            </a:r>
+            <a:r>
+              <a:rPr lang="en-US" dirty="0"/>
+              <a:t> Docker.</a:t>
+            </a:r>
+          </a:p>
+          <a:p>
+            <a:endParaRPr lang="en-US" dirty="0"/>
+          </a:p>
+          <a:p>
+            <a:r>
+              <a:rPr lang="en-US" dirty="0"/>
+              <a:t>Al </a:t>
+            </a:r>
+            <a:r>
+              <a:rPr lang="en-US" dirty="0" err="1"/>
+              <a:t>arrancar</a:t>
+            </a:r>
+            <a:r>
+              <a:rPr lang="en-US" dirty="0"/>
+              <a:t>, El backend carga </a:t>
+            </a:r>
+            <a:r>
+              <a:rPr lang="en-US" dirty="0" err="1"/>
+              <a:t>el</a:t>
+            </a:r>
+            <a:r>
+              <a:rPr lang="en-US" dirty="0"/>
+              <a:t> </a:t>
+            </a:r>
+            <a:r>
+              <a:rPr lang="en-US" dirty="0" err="1"/>
+              <a:t>modelo</a:t>
+            </a:r>
+            <a:r>
+              <a:rPr lang="en-US" dirty="0"/>
+              <a:t> </a:t>
+            </a:r>
+            <a:r>
+              <a:rPr lang="en-US" dirty="0" err="1"/>
+              <a:t>serializado</a:t>
+            </a:r>
+            <a:r>
+              <a:rPr lang="en-US" dirty="0"/>
+              <a:t>, </a:t>
+            </a:r>
+            <a:r>
+              <a:rPr lang="en-US" dirty="0" err="1"/>
+              <a:t>el</a:t>
+            </a:r>
+            <a:r>
+              <a:rPr lang="en-US" dirty="0"/>
+              <a:t> pre-</a:t>
+            </a:r>
+            <a:r>
+              <a:rPr lang="en-US" dirty="0" err="1"/>
+              <a:t>procesador</a:t>
+            </a:r>
+            <a:r>
+              <a:rPr lang="en-US" dirty="0"/>
+              <a:t> y la </a:t>
+            </a:r>
+            <a:r>
+              <a:rPr lang="en-US" dirty="0" err="1"/>
+              <a:t>muestra</a:t>
+            </a:r>
+            <a:r>
+              <a:rPr lang="en-US" dirty="0"/>
+              <a:t> de </a:t>
+            </a:r>
+            <a:r>
+              <a:rPr lang="en-US" dirty="0" err="1"/>
+              <a:t>fondo</a:t>
+            </a:r>
+            <a:r>
+              <a:rPr lang="en-US" dirty="0"/>
+              <a:t> para SHAP. </a:t>
+            </a:r>
+          </a:p>
+          <a:p>
+            <a:endParaRPr lang="en-US" dirty="0"/>
+          </a:p>
+          <a:p>
+            <a:r>
+              <a:rPr lang="en-US" dirty="0" err="1"/>
+              <a:t>Además</a:t>
+            </a:r>
+            <a:r>
+              <a:rPr lang="en-US" dirty="0"/>
+              <a:t> se </a:t>
+            </a:r>
+            <a:r>
+              <a:rPr lang="en-US" dirty="0" err="1"/>
+              <a:t>conecta</a:t>
+            </a:r>
+            <a:r>
+              <a:rPr lang="en-US" dirty="0"/>
+              <a:t> a </a:t>
+            </a:r>
+            <a:r>
+              <a:rPr lang="en-US" b="1" dirty="0"/>
+              <a:t>PostgreSQL</a:t>
+            </a:r>
+            <a:r>
+              <a:rPr lang="en-US" dirty="0"/>
+              <a:t> </a:t>
+            </a:r>
+            <a:r>
+              <a:rPr lang="en-US" dirty="0" err="1"/>
+              <a:t>en</a:t>
+            </a:r>
+            <a:r>
+              <a:rPr lang="en-US" dirty="0"/>
+              <a:t> </a:t>
+            </a:r>
+            <a:r>
+              <a:rPr lang="en-US" b="1" dirty="0" err="1"/>
+              <a:t>Supabase</a:t>
+            </a:r>
+            <a:r>
+              <a:rPr lang="en-US" dirty="0"/>
+              <a:t> para </a:t>
+            </a:r>
+            <a:r>
+              <a:rPr lang="en-US" dirty="0" err="1"/>
+              <a:t>guardar</a:t>
+            </a:r>
+            <a:r>
+              <a:rPr lang="en-US" dirty="0"/>
+              <a:t> </a:t>
+            </a:r>
+            <a:r>
+              <a:rPr lang="en-US" dirty="0" err="1"/>
+              <a:t>predicciones</a:t>
+            </a:r>
+            <a:r>
+              <a:rPr lang="en-US" dirty="0"/>
+              <a:t>, </a:t>
+            </a:r>
+            <a:r>
+              <a:rPr lang="en-US" dirty="0" err="1"/>
+              <a:t>explicaciones</a:t>
+            </a:r>
+            <a:r>
+              <a:rPr lang="en-US" dirty="0"/>
+              <a:t> y </a:t>
+            </a:r>
+            <a:r>
+              <a:rPr lang="en-US" dirty="0" err="1"/>
+              <a:t>simulaciones</a:t>
+            </a:r>
+            <a:r>
+              <a:rPr lang="en-US" dirty="0"/>
+              <a:t>.</a:t>
+            </a:r>
+          </a:p>
+          <a:p>
+            <a:endParaRPr lang="en-US" dirty="0"/>
+          </a:p>
+          <a:p>
+            <a:r>
+              <a:rPr lang="en-US" dirty="0"/>
+              <a:t>El </a:t>
+            </a:r>
+            <a:r>
+              <a:rPr lang="en-US" dirty="0" err="1"/>
+              <a:t>entrenamiento</a:t>
+            </a:r>
+            <a:r>
+              <a:rPr lang="en-US" dirty="0"/>
+              <a:t> del </a:t>
+            </a:r>
+            <a:r>
+              <a:rPr lang="en-US" dirty="0" err="1"/>
+              <a:t>modelo</a:t>
+            </a:r>
+            <a:r>
+              <a:rPr lang="en-US" dirty="0"/>
+              <a:t> se </a:t>
+            </a:r>
+            <a:r>
+              <a:rPr lang="en-US" dirty="0" err="1"/>
+              <a:t>hace</a:t>
+            </a:r>
+            <a:r>
+              <a:rPr lang="en-US" dirty="0"/>
+              <a:t> </a:t>
+            </a:r>
+            <a:r>
+              <a:rPr lang="en-US" b="1" dirty="0"/>
+              <a:t>offline.</a:t>
+            </a:r>
+          </a:p>
+          <a:p>
+            <a:r>
+              <a:rPr lang="en-US" dirty="0"/>
+              <a:t>En </a:t>
+            </a:r>
+            <a:r>
+              <a:rPr lang="en-US" dirty="0" err="1"/>
+              <a:t>inferencia</a:t>
+            </a:r>
+            <a:r>
+              <a:rPr lang="en-US" dirty="0"/>
+              <a:t> </a:t>
+            </a:r>
+            <a:r>
+              <a:rPr lang="en-US" b="1" dirty="0" err="1"/>
+              <a:t>nunca</a:t>
+            </a:r>
+            <a:r>
+              <a:rPr lang="en-US" dirty="0"/>
+              <a:t> </a:t>
+            </a:r>
+            <a:r>
+              <a:rPr lang="en-US" dirty="0" err="1"/>
+              <a:t>reentrenamos</a:t>
+            </a:r>
+            <a:r>
+              <a:rPr lang="en-US" dirty="0"/>
+              <a:t>: solo </a:t>
+            </a:r>
+            <a:r>
+              <a:rPr lang="en-US" dirty="0" err="1"/>
+              <a:t>predecimos</a:t>
+            </a:r>
+            <a:r>
+              <a:rPr lang="en-US" dirty="0"/>
+              <a:t> y </a:t>
+            </a:r>
+            <a:r>
+              <a:rPr lang="en-US" dirty="0" err="1"/>
+              <a:t>explicamos</a:t>
+            </a:r>
+            <a:r>
+              <a:rPr lang="en-US" dirty="0"/>
+              <a:t>. Esto es </a:t>
+            </a:r>
+            <a:r>
+              <a:rPr lang="en-US" dirty="0" err="1"/>
+              <a:t>crítico</a:t>
+            </a:r>
+            <a:r>
+              <a:rPr lang="en-US" dirty="0"/>
+              <a:t> para un </a:t>
+            </a:r>
+            <a:r>
+              <a:rPr lang="en-US" dirty="0" err="1"/>
+              <a:t>entorno</a:t>
+            </a:r>
+            <a:r>
+              <a:rPr lang="en-US" dirty="0"/>
+              <a:t> </a:t>
+            </a:r>
+            <a:r>
+              <a:rPr lang="en-US" dirty="0" err="1"/>
+              <a:t>clínico</a:t>
+            </a:r>
+            <a:r>
+              <a:rPr lang="en-US" dirty="0"/>
+              <a:t> </a:t>
+            </a:r>
+            <a:r>
+              <a:rPr lang="en-US" dirty="0" err="1"/>
+              <a:t>regulado</a:t>
+            </a:r>
+            <a:r>
+              <a:rPr lang="en-US" dirty="0"/>
+              <a:t>.»</a:t>
+            </a:r>
+          </a:p>
+          <a:p>
+            <a:endParaRPr lang="en-US" dirty="0"/>
+          </a:p>
+        </p:txBody>
+      </p:sp>
+      <p:sp>
+        <p:nvSpPr>
+          <p:cNvPr id="4" name="Slide Number Placeholder 3"/>
+          <p:cNvSpPr>
+            <a:spLocks noGrp="1"/>
+          </p:cNvSpPr>
+          <p:nvPr>
+            <p:ph type="sldNum" sz="quarter" idx="5"/>
+          </p:nvPr>
+        </p:nvSpPr>
+        <p:spPr/>
+        <p:txBody>
+          <a:bodyPr/>
+          <a:lstStyle/>
+          <a:p>
+            <a:fld id="{12BC5CD0-964A-412E-BAD3-D4ECB486B5E6}" type="slidenum">
+              <a:rPr lang="en-US" smtClean="0"/>
+              <a:t>5</a:t>
+            </a:fld>
+            <a:endParaRPr lang="en-US"/>
+          </a:p>
+        </p:txBody>
+      </p:sp>
+    </p:spTree>
+    <p:extLst>
+      <p:ext uri="{BB962C8B-B14F-4D97-AF65-F5344CB8AC3E}">
+        <p14:creationId xmlns:p14="http://schemas.microsoft.com/office/powerpoint/2010/main" val="983438440"/>
+      </p:ext>
+    </p:extLst>
+  </p:cSld>
+  <p:clrMapOvr>
+    <a:masterClrMapping/>
+  </p:clrMapOvr>
+</p:notes>
+</file>
+
+<file path=ppt/notesSlides/notesSlide6.xml><?xml version="1.0" encoding="utf-8"?>
+<p:notes xmlns:a="http://schemas.openxmlformats.org/drawingml/2006/main" xmlns:r="http://schemas.openxmlformats.org/officeDocument/2006/relationships" xmlns:p="http://schemas.openxmlformats.org/presentationml/2006/main">
+  <p:cSld>
+    <p:spTree>
+      <p:nvGrpSpPr>
+        <p:cNvPr id="1" name=""/>
+        <p:cNvGrpSpPr/>
+        <p:nvPr/>
+      </p:nvGrpSpPr>
+      <p:grpSpPr>
+        <a:xfrm>
+          <a:off x="0" y="0"/>
+          <a:ext cx="0" cy="0"/>
+          <a:chOff x="0" y="0"/>
+          <a:chExt cx="0" cy="0"/>
+        </a:xfrm>
+      </p:grpSpPr>
+      <p:sp>
+        <p:nvSpPr>
+          <p:cNvPr id="2" name="Slide Image Placeholder 1"/>
+          <p:cNvSpPr>
+            <a:spLocks noGrp="1" noRot="1" noChangeAspect="1"/>
+          </p:cNvSpPr>
+          <p:nvPr>
+            <p:ph type="sldImg"/>
+          </p:nvPr>
+        </p:nvSpPr>
+        <p:spPr/>
+      </p:sp>
+      <p:sp>
+        <p:nvSpPr>
+          <p:cNvPr id="3" name="Notes Placeholder 2"/>
+          <p:cNvSpPr>
+            <a:spLocks noGrp="1"/>
+          </p:cNvSpPr>
+          <p:nvPr>
+            <p:ph type="body" idx="1"/>
+          </p:nvPr>
+        </p:nvSpPr>
+        <p:spPr/>
+        <p:txBody>
+          <a:bodyPr/>
+          <a:lstStyle/>
+          <a:p>
+            <a:r>
+              <a:rPr lang="en-US" dirty="0"/>
+              <a:t>«El pipeline de machine learning </a:t>
+            </a:r>
+            <a:r>
+              <a:rPr lang="en-US" dirty="0" err="1"/>
+              <a:t>sigue</a:t>
+            </a:r>
+            <a:r>
+              <a:rPr lang="en-US" dirty="0"/>
+              <a:t> un </a:t>
+            </a:r>
+            <a:r>
+              <a:rPr lang="en-US" dirty="0" err="1"/>
+              <a:t>flujo</a:t>
+            </a:r>
+            <a:r>
+              <a:rPr lang="en-US" dirty="0"/>
+              <a:t> claro: </a:t>
+            </a:r>
+            <a:r>
+              <a:rPr lang="en-US" dirty="0" err="1"/>
+              <a:t>datos</a:t>
+            </a:r>
+            <a:r>
+              <a:rPr lang="en-US" dirty="0"/>
+              <a:t>, </a:t>
+            </a:r>
+            <a:r>
+              <a:rPr lang="en-US" dirty="0" err="1"/>
+              <a:t>preprocesamiento</a:t>
+            </a:r>
+            <a:r>
+              <a:rPr lang="en-US" dirty="0"/>
+              <a:t>, </a:t>
+            </a:r>
+            <a:r>
+              <a:rPr lang="en-US" dirty="0" err="1"/>
+              <a:t>entrenamiento</a:t>
+            </a:r>
+            <a:r>
+              <a:rPr lang="en-US" dirty="0"/>
+              <a:t> de </a:t>
+            </a:r>
+            <a:r>
+              <a:rPr lang="en-US" dirty="0" err="1"/>
+              <a:t>varios</a:t>
+            </a:r>
+            <a:r>
+              <a:rPr lang="en-US" dirty="0"/>
+              <a:t> </a:t>
+            </a:r>
+            <a:r>
+              <a:rPr lang="en-US" dirty="0" err="1"/>
+              <a:t>candidatos</a:t>
+            </a:r>
+            <a:r>
+              <a:rPr lang="en-US" dirty="0"/>
+              <a:t>, </a:t>
+            </a:r>
+            <a:r>
+              <a:rPr lang="en-US" dirty="0" err="1"/>
+              <a:t>evaluación</a:t>
+            </a:r>
+            <a:r>
+              <a:rPr lang="en-US" dirty="0"/>
+              <a:t>, </a:t>
+            </a:r>
+            <a:r>
+              <a:rPr lang="en-US" dirty="0" err="1"/>
+              <a:t>selección</a:t>
+            </a:r>
+            <a:r>
+              <a:rPr lang="en-US" dirty="0"/>
+              <a:t> del </a:t>
+            </a:r>
+            <a:r>
+              <a:rPr lang="en-US" dirty="0" err="1"/>
+              <a:t>modelo</a:t>
+            </a:r>
+            <a:r>
+              <a:rPr lang="en-US" dirty="0"/>
+              <a:t> final y </a:t>
+            </a:r>
+            <a:r>
+              <a:rPr lang="en-US" dirty="0" err="1"/>
+              <a:t>serialización</a:t>
+            </a:r>
+            <a:r>
+              <a:rPr lang="en-US" dirty="0"/>
+              <a:t> de </a:t>
+            </a:r>
+            <a:r>
+              <a:rPr lang="en-US" dirty="0" err="1"/>
+              <a:t>artefactos</a:t>
+            </a:r>
+            <a:r>
+              <a:rPr lang="en-US" dirty="0"/>
+              <a:t>.</a:t>
+            </a:r>
+          </a:p>
+          <a:p>
+            <a:endParaRPr lang="en-US" dirty="0"/>
+          </a:p>
+          <a:p>
+            <a:r>
+              <a:rPr lang="en-US" dirty="0" err="1"/>
+              <a:t>Usamos</a:t>
+            </a:r>
+            <a:r>
+              <a:rPr lang="en-US" dirty="0"/>
+              <a:t> </a:t>
+            </a:r>
+            <a:r>
+              <a:rPr lang="en-US" dirty="0" err="1"/>
+              <a:t>diecinueve</a:t>
+            </a:r>
+            <a:r>
+              <a:rPr lang="en-US" dirty="0"/>
+              <a:t> variables </a:t>
+            </a:r>
+            <a:r>
+              <a:rPr lang="en-US" dirty="0" err="1"/>
+              <a:t>clínicas</a:t>
+            </a:r>
+            <a:r>
+              <a:rPr lang="en-US" dirty="0"/>
+              <a:t> </a:t>
+            </a:r>
+            <a:r>
+              <a:rPr lang="en-US" dirty="0" err="1"/>
+              <a:t>derivadas</a:t>
+            </a:r>
+            <a:r>
+              <a:rPr lang="en-US" dirty="0"/>
+              <a:t> del dataset, con </a:t>
+            </a:r>
+            <a:r>
+              <a:rPr lang="en-US" dirty="0" err="1"/>
+              <a:t>imputación</a:t>
+            </a:r>
+            <a:r>
+              <a:rPr lang="en-US" dirty="0"/>
+              <a:t>, </a:t>
+            </a:r>
+            <a:r>
+              <a:rPr lang="en-US" dirty="0" err="1"/>
+              <a:t>escalado</a:t>
+            </a:r>
+            <a:r>
+              <a:rPr lang="en-US" dirty="0"/>
+              <a:t> y </a:t>
+            </a:r>
+            <a:r>
+              <a:rPr lang="en-US" dirty="0" err="1"/>
+              <a:t>codificación</a:t>
+            </a:r>
+            <a:r>
+              <a:rPr lang="en-US" dirty="0"/>
+              <a:t> one-hot. </a:t>
+            </a:r>
+            <a:r>
+              <a:rPr lang="en-US" dirty="0" err="1"/>
+              <a:t>Evaluamos</a:t>
+            </a:r>
+            <a:r>
+              <a:rPr lang="en-US" dirty="0"/>
+              <a:t> </a:t>
+            </a:r>
+            <a:r>
+              <a:rPr lang="en-US" dirty="0" err="1"/>
+              <a:t>modelos</a:t>
+            </a:r>
+            <a:r>
+              <a:rPr lang="en-US" dirty="0"/>
+              <a:t> </a:t>
+            </a:r>
+            <a:r>
+              <a:rPr lang="en-US" dirty="0" err="1"/>
+              <a:t>regresión</a:t>
+            </a:r>
+            <a:r>
+              <a:rPr lang="en-US" dirty="0"/>
+              <a:t> </a:t>
+            </a:r>
+            <a:r>
+              <a:rPr lang="en-US" dirty="0" err="1"/>
+              <a:t>logística</a:t>
+            </a:r>
+            <a:r>
+              <a:rPr lang="en-US" dirty="0"/>
+              <a:t>, random forest y </a:t>
+            </a:r>
+            <a:r>
+              <a:rPr lang="en-US" dirty="0" err="1"/>
+              <a:t>XGBoost</a:t>
+            </a:r>
+            <a:r>
+              <a:rPr lang="en-US" dirty="0"/>
+              <a:t>.</a:t>
+            </a:r>
+          </a:p>
+          <a:p>
+            <a:r>
+              <a:rPr lang="en-US" dirty="0"/>
+              <a:t>El </a:t>
+            </a:r>
+            <a:r>
+              <a:rPr lang="en-US" dirty="0" err="1"/>
+              <a:t>modelo</a:t>
+            </a:r>
+            <a:r>
+              <a:rPr lang="en-US" dirty="0"/>
+              <a:t> </a:t>
+            </a:r>
+            <a:r>
+              <a:rPr lang="en-US" dirty="0" err="1"/>
+              <a:t>que</a:t>
+            </a:r>
+            <a:r>
+              <a:rPr lang="en-US" dirty="0"/>
+              <a:t> </a:t>
+            </a:r>
+            <a:r>
+              <a:rPr lang="en-US" dirty="0" err="1"/>
+              <a:t>hemos</a:t>
+            </a:r>
+            <a:r>
+              <a:rPr lang="en-US" dirty="0"/>
+              <a:t> </a:t>
+            </a:r>
+            <a:r>
+              <a:rPr lang="en-US" dirty="0" err="1"/>
+              <a:t>elegido</a:t>
+            </a:r>
+            <a:r>
+              <a:rPr lang="en-US" dirty="0"/>
+              <a:t> </a:t>
+            </a:r>
+            <a:r>
+              <a:rPr lang="en-US" dirty="0" err="1"/>
+              <a:t>poner</a:t>
+            </a:r>
+            <a:r>
+              <a:rPr lang="en-US" dirty="0"/>
+              <a:t> </a:t>
+            </a:r>
+            <a:r>
+              <a:rPr lang="en-US" dirty="0" err="1"/>
+              <a:t>en</a:t>
+            </a:r>
+            <a:r>
+              <a:rPr lang="en-US" dirty="0"/>
+              <a:t> </a:t>
+            </a:r>
+            <a:r>
+              <a:rPr lang="en-US" dirty="0" err="1"/>
+              <a:t>en</a:t>
+            </a:r>
+            <a:r>
+              <a:rPr lang="en-US" dirty="0"/>
+              <a:t> </a:t>
+            </a:r>
+            <a:r>
+              <a:rPr lang="en-US" dirty="0" err="1"/>
+              <a:t>producción</a:t>
+            </a:r>
+            <a:r>
+              <a:rPr lang="en-US" dirty="0"/>
+              <a:t> es </a:t>
+            </a:r>
+            <a:r>
+              <a:rPr lang="en-US" dirty="0" err="1"/>
+              <a:t>el</a:t>
+            </a:r>
+            <a:r>
+              <a:rPr lang="en-US" dirty="0"/>
+              <a:t> de </a:t>
+            </a:r>
+            <a:r>
+              <a:rPr lang="en-US" b="1" dirty="0" err="1"/>
+              <a:t>regresión</a:t>
+            </a:r>
+            <a:r>
+              <a:rPr lang="en-US" b="1" dirty="0"/>
+              <a:t> </a:t>
+            </a:r>
+            <a:r>
+              <a:rPr lang="en-US" b="1" dirty="0" err="1"/>
+              <a:t>logística</a:t>
+            </a:r>
+            <a:r>
+              <a:rPr lang="en-US" b="1" dirty="0"/>
+              <a:t> </a:t>
+            </a:r>
+            <a:r>
+              <a:rPr lang="en-US" b="1" dirty="0" err="1"/>
+              <a:t>versión</a:t>
+            </a:r>
+            <a:r>
+              <a:rPr lang="en-US" dirty="0"/>
+              <a:t> con </a:t>
+            </a:r>
+            <a:r>
+              <a:rPr lang="en-US" dirty="0" err="1"/>
+              <a:t>explicador</a:t>
+            </a:r>
+            <a:r>
+              <a:rPr lang="en-US" dirty="0"/>
+              <a:t> SHAP lineal, </a:t>
+            </a:r>
+            <a:r>
+              <a:rPr lang="en-US" dirty="0" err="1"/>
+              <a:t>por</a:t>
+            </a:r>
+            <a:r>
+              <a:rPr lang="en-US" dirty="0"/>
+              <a:t> </a:t>
+            </a:r>
+            <a:r>
+              <a:rPr lang="en-US" dirty="0" err="1"/>
+              <a:t>una</a:t>
+            </a:r>
+            <a:r>
+              <a:rPr lang="en-US" dirty="0"/>
+              <a:t> </a:t>
+            </a:r>
+            <a:r>
+              <a:rPr lang="en-US" dirty="0" err="1"/>
+              <a:t>razón</a:t>
+            </a:r>
+            <a:r>
+              <a:rPr lang="en-US" dirty="0"/>
+              <a:t> </a:t>
+            </a:r>
+            <a:r>
+              <a:rPr lang="en-US" dirty="0" err="1"/>
+              <a:t>clínica</a:t>
+            </a:r>
+            <a:r>
+              <a:rPr lang="en-US" dirty="0"/>
+              <a:t> </a:t>
+            </a:r>
+            <a:r>
+              <a:rPr lang="en-US" dirty="0" err="1"/>
+              <a:t>deliberada</a:t>
+            </a:r>
+            <a:r>
+              <a:rPr lang="en-US" dirty="0"/>
+              <a:t> </a:t>
+            </a:r>
+            <a:r>
+              <a:rPr lang="en-US" dirty="0" err="1"/>
+              <a:t>que</a:t>
+            </a:r>
+            <a:r>
+              <a:rPr lang="en-US" dirty="0"/>
+              <a:t> </a:t>
+            </a:r>
+            <a:r>
+              <a:rPr lang="en-US" dirty="0" err="1"/>
+              <a:t>veremos</a:t>
+            </a:r>
+            <a:r>
+              <a:rPr lang="en-US" dirty="0"/>
+              <a:t> </a:t>
+            </a:r>
+            <a:r>
+              <a:rPr lang="en-US" dirty="0" err="1"/>
+              <a:t>en</a:t>
+            </a:r>
+            <a:r>
+              <a:rPr lang="en-US" dirty="0"/>
+              <a:t> la </a:t>
+            </a:r>
+            <a:r>
+              <a:rPr lang="en-US" dirty="0" err="1"/>
+              <a:t>siguiente</a:t>
+            </a:r>
+            <a:r>
+              <a:rPr lang="en-US" dirty="0"/>
+              <a:t> </a:t>
+            </a:r>
+            <a:r>
+              <a:rPr lang="en-US" dirty="0" err="1"/>
+              <a:t>diapositiva</a:t>
+            </a:r>
+            <a:r>
+              <a:rPr lang="en-US" dirty="0"/>
+              <a:t>.»</a:t>
+            </a:r>
+          </a:p>
+          <a:p>
+            <a:endParaRPr lang="en-US" dirty="0"/>
+          </a:p>
+        </p:txBody>
+      </p:sp>
+      <p:sp>
+        <p:nvSpPr>
+          <p:cNvPr id="4" name="Slide Number Placeholder 3"/>
+          <p:cNvSpPr>
+            <a:spLocks noGrp="1"/>
+          </p:cNvSpPr>
+          <p:nvPr>
+            <p:ph type="sldNum" sz="quarter" idx="5"/>
+          </p:nvPr>
+        </p:nvSpPr>
+        <p:spPr/>
+        <p:txBody>
+          <a:bodyPr/>
+          <a:lstStyle/>
+          <a:p>
+            <a:fld id="{12BC5CD0-964A-412E-BAD3-D4ECB486B5E6}" type="slidenum">
+              <a:rPr lang="en-US" smtClean="0"/>
+              <a:t>6</a:t>
+            </a:fld>
+            <a:endParaRPr lang="en-US"/>
+          </a:p>
+        </p:txBody>
+      </p:sp>
+    </p:spTree>
+    <p:extLst>
+      <p:ext uri="{BB962C8B-B14F-4D97-AF65-F5344CB8AC3E}">
+        <p14:creationId xmlns:p14="http://schemas.microsoft.com/office/powerpoint/2010/main" val="2465719461"/>
+      </p:ext>
+    </p:extLst>
+  </p:cSld>
+  <p:clrMapOvr>
+    <a:masterClrMapping/>
+  </p:clrMapOvr>
+</p:notes>
+</file>
+
+<file path=ppt/notesSlides/notesSlide7.xml><?xml version="1.0" encoding="utf-8"?>
+<p:notes xmlns:a="http://schemas.openxmlformats.org/drawingml/2006/main" xmlns:r="http://schemas.openxmlformats.org/officeDocument/2006/relationships" xmlns:p="http://schemas.openxmlformats.org/presentationml/2006/main">
+  <p:cSld>
+    <p:spTree>
+      <p:nvGrpSpPr>
+        <p:cNvPr id="1" name=""/>
+        <p:cNvGrpSpPr/>
+        <p:nvPr/>
+      </p:nvGrpSpPr>
+      <p:grpSpPr>
+        <a:xfrm>
+          <a:off x="0" y="0"/>
+          <a:ext cx="0" cy="0"/>
+          <a:chOff x="0" y="0"/>
+          <a:chExt cx="0" cy="0"/>
+        </a:xfrm>
+      </p:grpSpPr>
+      <p:sp>
+        <p:nvSpPr>
+          <p:cNvPr id="2" name="Slide Image Placeholder 1"/>
+          <p:cNvSpPr>
+            <a:spLocks noGrp="1" noRot="1" noChangeAspect="1"/>
+          </p:cNvSpPr>
+          <p:nvPr>
+            <p:ph type="sldImg"/>
+          </p:nvPr>
+        </p:nvSpPr>
+        <p:spPr/>
+      </p:sp>
+      <p:sp>
+        <p:nvSpPr>
+          <p:cNvPr id="3" name="Notes Placeholder 2"/>
+          <p:cNvSpPr>
+            <a:spLocks noGrp="1"/>
+          </p:cNvSpPr>
+          <p:nvPr>
+            <p:ph type="body" idx="1"/>
+          </p:nvPr>
+        </p:nvSpPr>
+        <p:spPr/>
+        <p:txBody>
+          <a:bodyPr/>
+          <a:lstStyle/>
+          <a:p>
+            <a:r>
+              <a:rPr lang="en-US" dirty="0"/>
+              <a:t>«En </a:t>
+            </a:r>
+            <a:r>
+              <a:rPr lang="en-US" dirty="0" err="1"/>
+              <a:t>el</a:t>
+            </a:r>
+            <a:r>
+              <a:rPr lang="en-US" dirty="0"/>
+              <a:t> conjunto de test — </a:t>
+            </a:r>
+            <a:r>
+              <a:rPr lang="en-US" dirty="0" err="1"/>
+              <a:t>datos</a:t>
+            </a:r>
+            <a:r>
+              <a:rPr lang="en-US" dirty="0"/>
+              <a:t> </a:t>
+            </a:r>
+            <a:r>
+              <a:rPr lang="en-US" dirty="0" err="1"/>
+              <a:t>que</a:t>
+            </a:r>
+            <a:r>
+              <a:rPr lang="en-US" dirty="0"/>
+              <a:t> </a:t>
+            </a:r>
+            <a:r>
+              <a:rPr lang="en-US" dirty="0" err="1"/>
+              <a:t>el</a:t>
+            </a:r>
+            <a:r>
+              <a:rPr lang="en-US" dirty="0"/>
+              <a:t> </a:t>
+            </a:r>
+            <a:r>
+              <a:rPr lang="en-US" dirty="0" err="1"/>
+              <a:t>modelo</a:t>
+            </a:r>
+            <a:r>
+              <a:rPr lang="en-US" dirty="0"/>
+              <a:t> no </a:t>
+            </a:r>
+            <a:r>
+              <a:rPr lang="en-US" dirty="0" err="1"/>
+              <a:t>vio</a:t>
+            </a:r>
+            <a:r>
+              <a:rPr lang="en-US" dirty="0"/>
+              <a:t> </a:t>
+            </a:r>
+            <a:r>
+              <a:rPr lang="en-US" dirty="0" err="1"/>
+              <a:t>en</a:t>
+            </a:r>
+            <a:r>
+              <a:rPr lang="en-US" dirty="0"/>
+              <a:t> </a:t>
+            </a:r>
+            <a:r>
+              <a:rPr lang="en-US" dirty="0" err="1"/>
+              <a:t>entrenamiento</a:t>
+            </a:r>
+            <a:r>
+              <a:rPr lang="en-US" dirty="0"/>
+              <a:t> — la </a:t>
+            </a:r>
+            <a:r>
+              <a:rPr lang="en-US" dirty="0" err="1"/>
+              <a:t>regresión</a:t>
+            </a:r>
+            <a:r>
+              <a:rPr lang="en-US" dirty="0"/>
+              <a:t> </a:t>
+            </a:r>
+            <a:r>
+              <a:rPr lang="en-US" dirty="0" err="1"/>
+              <a:t>logística</a:t>
+            </a:r>
+            <a:r>
+              <a:rPr lang="en-US" dirty="0"/>
+              <a:t> </a:t>
+            </a:r>
+            <a:r>
+              <a:rPr lang="en-US" dirty="0" err="1"/>
+              <a:t>obtiene</a:t>
+            </a:r>
+            <a:r>
+              <a:rPr lang="en-US" dirty="0"/>
+              <a:t> </a:t>
+            </a:r>
+            <a:r>
+              <a:rPr lang="en-US" dirty="0" err="1"/>
+              <a:t>una</a:t>
+            </a:r>
+            <a:r>
+              <a:rPr lang="en-US" dirty="0"/>
+              <a:t> accuracy de </a:t>
+            </a:r>
+            <a:r>
+              <a:rPr lang="en-US" dirty="0" err="1"/>
+              <a:t>aproximadamente</a:t>
+            </a:r>
+            <a:r>
+              <a:rPr lang="en-US" dirty="0"/>
+              <a:t> </a:t>
+            </a:r>
+            <a:r>
+              <a:rPr lang="en-US" b="1" dirty="0" err="1"/>
+              <a:t>sesenta</a:t>
+            </a:r>
+            <a:r>
+              <a:rPr lang="en-US" b="1" dirty="0"/>
+              <a:t> y un </a:t>
+            </a:r>
+            <a:r>
+              <a:rPr lang="en-US" b="1" dirty="0" err="1"/>
+              <a:t>por</a:t>
+            </a:r>
+            <a:r>
+              <a:rPr lang="en-US" b="1" dirty="0"/>
+              <a:t> </a:t>
+            </a:r>
+            <a:r>
+              <a:rPr lang="en-US" b="1" dirty="0" err="1"/>
+              <a:t>ciento</a:t>
+            </a:r>
+            <a:r>
+              <a:rPr lang="en-US" dirty="0"/>
+              <a:t>. El KPI del </a:t>
+            </a:r>
+            <a:r>
+              <a:rPr lang="en-US" dirty="0" err="1"/>
+              <a:t>proyecto</a:t>
+            </a:r>
+            <a:r>
+              <a:rPr lang="en-US" dirty="0"/>
+              <a:t> </a:t>
+            </a:r>
+            <a:r>
+              <a:rPr lang="en-US" dirty="0" err="1"/>
+              <a:t>pedía</a:t>
+            </a:r>
+            <a:r>
+              <a:rPr lang="en-US" dirty="0"/>
+              <a:t> </a:t>
+            </a:r>
+            <a:r>
+              <a:rPr lang="en-US" dirty="0" err="1"/>
+              <a:t>setenta</a:t>
+            </a:r>
+            <a:r>
+              <a:rPr lang="en-US" dirty="0"/>
+              <a:t> y </a:t>
+            </a:r>
+            <a:r>
+              <a:rPr lang="en-US" dirty="0" err="1"/>
+              <a:t>cinco</a:t>
+            </a:r>
+            <a:r>
+              <a:rPr lang="en-US" dirty="0"/>
+              <a:t>, y </a:t>
+            </a:r>
+            <a:r>
+              <a:rPr lang="en-US" b="1" dirty="0"/>
+              <a:t>no lo </a:t>
+            </a:r>
+            <a:r>
+              <a:rPr lang="en-US" b="1" dirty="0" err="1"/>
+              <a:t>alcanzamos</a:t>
+            </a:r>
+            <a:r>
+              <a:rPr lang="en-US" dirty="0"/>
+              <a:t>. Lo </a:t>
+            </a:r>
+            <a:r>
+              <a:rPr lang="en-US" dirty="0" err="1"/>
+              <a:t>cual</a:t>
+            </a:r>
+            <a:r>
+              <a:rPr lang="en-US" dirty="0"/>
+              <a:t>, ha </a:t>
+            </a:r>
+            <a:r>
+              <a:rPr lang="en-US" dirty="0" err="1"/>
+              <a:t>quedado</a:t>
+            </a:r>
+            <a:r>
+              <a:rPr lang="en-US" dirty="0"/>
+              <a:t> </a:t>
+            </a:r>
+            <a:r>
+              <a:rPr lang="en-US" dirty="0" err="1"/>
+              <a:t>documentado</a:t>
+            </a:r>
+            <a:r>
+              <a:rPr lang="en-US" dirty="0"/>
+              <a:t> </a:t>
+            </a:r>
+            <a:r>
+              <a:rPr lang="en-US" dirty="0" err="1"/>
+              <a:t>en</a:t>
+            </a:r>
+            <a:r>
+              <a:rPr lang="en-US" dirty="0"/>
+              <a:t> la </a:t>
+            </a:r>
+            <a:r>
+              <a:rPr lang="en-US" dirty="0" err="1"/>
+              <a:t>documentación</a:t>
+            </a:r>
+            <a:r>
+              <a:rPr lang="en-US" dirty="0"/>
+              <a:t> del Proyecto.</a:t>
+            </a:r>
+          </a:p>
+          <a:p>
+            <a:endParaRPr lang="en-US" dirty="0"/>
+          </a:p>
+          <a:p>
+            <a:r>
+              <a:rPr lang="en-US" dirty="0"/>
+              <a:t>Sin embargo, </a:t>
+            </a:r>
+            <a:r>
+              <a:rPr lang="en-US" dirty="0" err="1"/>
+              <a:t>en</a:t>
+            </a:r>
+            <a:r>
+              <a:rPr lang="en-US" dirty="0"/>
+              <a:t> un </a:t>
+            </a:r>
+            <a:r>
+              <a:rPr lang="en-US" dirty="0" err="1"/>
+              <a:t>sistema</a:t>
+            </a:r>
+            <a:r>
+              <a:rPr lang="en-US" dirty="0"/>
+              <a:t> de </a:t>
+            </a:r>
+            <a:r>
+              <a:rPr lang="en-US" dirty="0" err="1"/>
+              <a:t>apoyo</a:t>
+            </a:r>
+            <a:r>
+              <a:rPr lang="en-US" dirty="0"/>
+              <a:t> a la </a:t>
+            </a:r>
+            <a:r>
+              <a:rPr lang="en-US" dirty="0" err="1"/>
+              <a:t>decisión</a:t>
+            </a:r>
+            <a:r>
+              <a:rPr lang="en-US" dirty="0"/>
+              <a:t> </a:t>
+            </a:r>
+            <a:r>
+              <a:rPr lang="en-US" dirty="0" err="1"/>
+              <a:t>priorizamos</a:t>
+            </a:r>
+            <a:r>
+              <a:rPr lang="en-US" dirty="0"/>
+              <a:t> </a:t>
+            </a:r>
+            <a:r>
+              <a:rPr lang="en-US" b="1" dirty="0"/>
+              <a:t>recall</a:t>
+            </a:r>
+            <a:r>
+              <a:rPr lang="en-US" dirty="0"/>
+              <a:t>: la </a:t>
+            </a:r>
+            <a:r>
+              <a:rPr lang="en-US" dirty="0" err="1"/>
+              <a:t>capacidad</a:t>
+            </a:r>
+            <a:r>
+              <a:rPr lang="en-US" dirty="0"/>
+              <a:t> de </a:t>
+            </a:r>
+            <a:r>
+              <a:rPr lang="en-US" dirty="0" err="1"/>
+              <a:t>detectar</a:t>
+            </a:r>
+            <a:r>
+              <a:rPr lang="en-US" dirty="0"/>
+              <a:t> </a:t>
+            </a:r>
+            <a:r>
+              <a:rPr lang="en-US" dirty="0" err="1"/>
+              <a:t>readmisiones</a:t>
+            </a:r>
+            <a:r>
+              <a:rPr lang="en-US" dirty="0"/>
+              <a:t> reales. </a:t>
+            </a:r>
+            <a:r>
+              <a:rPr lang="en-US" dirty="0" err="1"/>
+              <a:t>Aquí</a:t>
+            </a:r>
+            <a:r>
+              <a:rPr lang="en-US" dirty="0"/>
+              <a:t> la </a:t>
+            </a:r>
+            <a:r>
+              <a:rPr lang="en-US" dirty="0" err="1"/>
+              <a:t>logística</a:t>
+            </a:r>
+            <a:r>
+              <a:rPr lang="en-US" dirty="0"/>
+              <a:t> </a:t>
+            </a:r>
+            <a:r>
+              <a:rPr lang="en-US" dirty="0" err="1"/>
+              <a:t>alcanza</a:t>
+            </a:r>
+            <a:r>
+              <a:rPr lang="en-US" dirty="0"/>
+              <a:t> un recall de </a:t>
+            </a:r>
+            <a:r>
+              <a:rPr lang="en-US" b="1" dirty="0" err="1"/>
+              <a:t>cincuenta</a:t>
+            </a:r>
+            <a:r>
+              <a:rPr lang="en-US" b="1" dirty="0"/>
+              <a:t> y cuatro </a:t>
+            </a:r>
+            <a:r>
+              <a:rPr lang="en-US" b="1" dirty="0" err="1"/>
+              <a:t>por</a:t>
+            </a:r>
+            <a:r>
+              <a:rPr lang="en-US" b="1" dirty="0"/>
+              <a:t> </a:t>
+            </a:r>
+            <a:r>
+              <a:rPr lang="en-US" b="1" dirty="0" err="1"/>
+              <a:t>ciento</a:t>
+            </a:r>
+            <a:r>
+              <a:rPr lang="en-US" dirty="0"/>
+              <a:t>, </a:t>
+            </a:r>
+            <a:r>
+              <a:rPr lang="en-US" dirty="0" err="1"/>
+              <a:t>frente</a:t>
+            </a:r>
+            <a:r>
+              <a:rPr lang="en-US" dirty="0"/>
+              <a:t> a un </a:t>
+            </a:r>
+            <a:r>
+              <a:rPr lang="en-US" dirty="0" err="1"/>
+              <a:t>veinte</a:t>
+            </a:r>
+            <a:r>
+              <a:rPr lang="en-US" dirty="0"/>
+              <a:t> </a:t>
+            </a:r>
+            <a:r>
+              <a:rPr lang="en-US" dirty="0" err="1"/>
+              <a:t>por</a:t>
+            </a:r>
+            <a:r>
+              <a:rPr lang="en-US" dirty="0"/>
+              <a:t> </a:t>
+            </a:r>
+            <a:r>
+              <a:rPr lang="en-US" dirty="0" err="1"/>
+              <a:t>ciento</a:t>
+            </a:r>
+            <a:r>
+              <a:rPr lang="en-US" dirty="0"/>
+              <a:t> del random forest, </a:t>
+            </a:r>
+            <a:r>
+              <a:rPr lang="en-US" dirty="0" err="1"/>
+              <a:t>que</a:t>
+            </a:r>
+            <a:r>
+              <a:rPr lang="en-US" dirty="0"/>
+              <a:t> </a:t>
+            </a:r>
+            <a:r>
+              <a:rPr lang="en-US" dirty="0" err="1"/>
+              <a:t>sí</a:t>
+            </a:r>
+            <a:r>
+              <a:rPr lang="en-US" dirty="0"/>
+              <a:t> </a:t>
+            </a:r>
+            <a:r>
+              <a:rPr lang="en-US" dirty="0" err="1"/>
+              <a:t>tenía</a:t>
+            </a:r>
+            <a:r>
+              <a:rPr lang="en-US" dirty="0"/>
+              <a:t> </a:t>
+            </a:r>
+            <a:r>
+              <a:rPr lang="en-US" dirty="0" err="1"/>
+              <a:t>más</a:t>
+            </a:r>
+            <a:r>
+              <a:rPr lang="en-US" dirty="0"/>
+              <a:t> accuracy </a:t>
+            </a:r>
+            <a:r>
+              <a:rPr lang="en-US" dirty="0" err="1"/>
+              <a:t>pero</a:t>
+            </a:r>
+            <a:r>
+              <a:rPr lang="en-US" dirty="0"/>
+              <a:t> </a:t>
+            </a:r>
+            <a:r>
+              <a:rPr lang="en-US" dirty="0" err="1"/>
+              <a:t>perdía</a:t>
+            </a:r>
+            <a:r>
+              <a:rPr lang="en-US" dirty="0"/>
+              <a:t> la </a:t>
+            </a:r>
+            <a:r>
+              <a:rPr lang="en-US" dirty="0" err="1"/>
+              <a:t>mayoría</a:t>
+            </a:r>
+            <a:r>
+              <a:rPr lang="en-US" dirty="0"/>
+              <a:t> de </a:t>
+            </a:r>
+            <a:r>
+              <a:rPr lang="en-US" dirty="0" err="1"/>
+              <a:t>los</a:t>
+            </a:r>
+            <a:r>
+              <a:rPr lang="en-US" dirty="0"/>
+              <a:t> </a:t>
+            </a:r>
+            <a:r>
+              <a:rPr lang="en-US" dirty="0" err="1"/>
+              <a:t>casos</a:t>
+            </a:r>
+            <a:r>
+              <a:rPr lang="en-US" dirty="0"/>
+              <a:t> </a:t>
+            </a:r>
+            <a:r>
+              <a:rPr lang="en-US" dirty="0" err="1"/>
+              <a:t>positivos</a:t>
+            </a:r>
+            <a:r>
+              <a:rPr lang="en-US" dirty="0"/>
+              <a:t>.</a:t>
+            </a:r>
+          </a:p>
+          <a:p>
+            <a:endParaRPr lang="en-US" dirty="0"/>
+          </a:p>
+          <a:p>
+            <a:r>
+              <a:rPr lang="en-US" dirty="0"/>
+              <a:t>En un </a:t>
+            </a:r>
+            <a:r>
+              <a:rPr lang="en-US" dirty="0" err="1"/>
+              <a:t>entorno</a:t>
+            </a:r>
+            <a:r>
+              <a:rPr lang="en-US" dirty="0"/>
+              <a:t> </a:t>
+            </a:r>
+            <a:r>
+              <a:rPr lang="en-US" dirty="0" err="1"/>
+              <a:t>clínico</a:t>
+            </a:r>
+            <a:r>
+              <a:rPr lang="en-US" dirty="0"/>
+              <a:t>, </a:t>
+            </a:r>
+            <a:r>
+              <a:rPr lang="en-US" dirty="0" err="1"/>
+              <a:t>perder</a:t>
+            </a:r>
+            <a:r>
+              <a:rPr lang="en-US" dirty="0"/>
+              <a:t> un </a:t>
+            </a:r>
+            <a:r>
+              <a:rPr lang="en-US" dirty="0" err="1"/>
+              <a:t>paciente</a:t>
+            </a:r>
+            <a:r>
+              <a:rPr lang="en-US" dirty="0"/>
+              <a:t> de alto </a:t>
+            </a:r>
+            <a:r>
+              <a:rPr lang="en-US" dirty="0" err="1"/>
+              <a:t>riesgo</a:t>
+            </a:r>
+            <a:r>
+              <a:rPr lang="en-US" dirty="0"/>
+              <a:t> </a:t>
+            </a:r>
+            <a:r>
+              <a:rPr lang="en-US" dirty="0" err="1"/>
+              <a:t>suele</a:t>
+            </a:r>
+            <a:r>
+              <a:rPr lang="en-US" dirty="0"/>
+              <a:t> ser </a:t>
+            </a:r>
+            <a:r>
+              <a:rPr lang="en-US" dirty="0" err="1"/>
+              <a:t>más</a:t>
+            </a:r>
+            <a:r>
+              <a:rPr lang="en-US" dirty="0"/>
+              <a:t> grave </a:t>
+            </a:r>
+            <a:r>
+              <a:rPr lang="en-US" dirty="0" err="1"/>
+              <a:t>que</a:t>
+            </a:r>
+            <a:r>
+              <a:rPr lang="en-US" dirty="0"/>
+              <a:t> </a:t>
+            </a:r>
+            <a:r>
+              <a:rPr lang="en-US" dirty="0" err="1"/>
+              <a:t>generar</a:t>
+            </a:r>
+            <a:r>
+              <a:rPr lang="en-US" dirty="0"/>
+              <a:t> </a:t>
+            </a:r>
+            <a:r>
+              <a:rPr lang="en-US" dirty="0" err="1"/>
+              <a:t>una</a:t>
+            </a:r>
+            <a:r>
+              <a:rPr lang="en-US" dirty="0"/>
+              <a:t> </a:t>
+            </a:r>
+            <a:r>
+              <a:rPr lang="en-US" dirty="0" err="1"/>
+              <a:t>alerta</a:t>
+            </a:r>
+            <a:r>
+              <a:rPr lang="en-US" dirty="0"/>
+              <a:t> de </a:t>
+            </a:r>
+            <a:r>
+              <a:rPr lang="en-US" dirty="0" err="1"/>
+              <a:t>más</a:t>
+            </a:r>
+            <a:r>
+              <a:rPr lang="en-US" dirty="0"/>
+              <a:t>. Esta </a:t>
+            </a:r>
+            <a:r>
+              <a:rPr lang="en-US" dirty="0" err="1"/>
+              <a:t>fue</a:t>
+            </a:r>
+            <a:r>
+              <a:rPr lang="en-US" dirty="0"/>
+              <a:t> la </a:t>
+            </a:r>
+            <a:r>
+              <a:rPr lang="en-US" dirty="0" err="1"/>
+              <a:t>razón</a:t>
+            </a:r>
+            <a:r>
+              <a:rPr lang="en-US" dirty="0"/>
+              <a:t> </a:t>
+            </a:r>
+            <a:r>
+              <a:rPr lang="en-US" dirty="0" err="1"/>
+              <a:t>por</a:t>
+            </a:r>
+            <a:r>
+              <a:rPr lang="en-US" dirty="0"/>
+              <a:t> la </a:t>
+            </a:r>
+            <a:r>
+              <a:rPr lang="en-US" dirty="0" err="1"/>
+              <a:t>cual</a:t>
+            </a:r>
+            <a:r>
+              <a:rPr lang="en-US" dirty="0"/>
+              <a:t> </a:t>
+            </a:r>
+            <a:r>
+              <a:rPr lang="en-US" dirty="0" err="1"/>
+              <a:t>elegímos</a:t>
+            </a:r>
+            <a:r>
+              <a:rPr lang="en-US" dirty="0"/>
+              <a:t> </a:t>
+            </a:r>
+            <a:r>
+              <a:rPr lang="en-US" dirty="0" err="1"/>
+              <a:t>el</a:t>
+            </a:r>
+            <a:r>
+              <a:rPr lang="en-US" dirty="0"/>
+              <a:t> </a:t>
+            </a:r>
+            <a:r>
+              <a:rPr lang="en-US" dirty="0" err="1"/>
+              <a:t>modelo</a:t>
+            </a:r>
+            <a:r>
+              <a:rPr lang="en-US" dirty="0"/>
+              <a:t> de regression. La </a:t>
+            </a:r>
+            <a:r>
+              <a:rPr lang="en-US" dirty="0" err="1"/>
+              <a:t>precisión</a:t>
+            </a:r>
+            <a:r>
+              <a:rPr lang="en-US" dirty="0"/>
+              <a:t> es baja — hay falsas </a:t>
+            </a:r>
+            <a:r>
+              <a:rPr lang="en-US" dirty="0" err="1"/>
+              <a:t>alarmas</a:t>
+            </a:r>
+            <a:r>
+              <a:rPr lang="en-US" dirty="0"/>
+              <a:t> — </a:t>
+            </a:r>
+            <a:r>
+              <a:rPr lang="en-US" dirty="0" err="1"/>
+              <a:t>pero</a:t>
+            </a:r>
+            <a:r>
+              <a:rPr lang="en-US" dirty="0"/>
+              <a:t> </a:t>
+            </a:r>
+            <a:r>
+              <a:rPr lang="en-US" dirty="0" err="1"/>
+              <a:t>esto</a:t>
+            </a:r>
+            <a:r>
+              <a:rPr lang="en-US" dirty="0"/>
+              <a:t> es </a:t>
+            </a:r>
+            <a:r>
+              <a:rPr lang="en-US" dirty="0" err="1"/>
+              <a:t>una</a:t>
+            </a:r>
+            <a:r>
+              <a:rPr lang="en-US" dirty="0"/>
+              <a:t> </a:t>
+            </a:r>
+            <a:r>
+              <a:rPr lang="en-US" dirty="0" err="1"/>
+              <a:t>limitación</a:t>
+            </a:r>
+            <a:r>
+              <a:rPr lang="en-US" dirty="0"/>
+              <a:t> </a:t>
+            </a:r>
+            <a:r>
+              <a:rPr lang="en-US" dirty="0" err="1"/>
+              <a:t>explícita</a:t>
+            </a:r>
+            <a:r>
+              <a:rPr lang="en-US" dirty="0"/>
+              <a:t> del </a:t>
+            </a:r>
+            <a:r>
+              <a:rPr lang="en-US" dirty="0" err="1"/>
+              <a:t>proyecto</a:t>
+            </a:r>
+            <a:r>
+              <a:rPr lang="en-US" dirty="0"/>
+              <a:t>.»</a:t>
+            </a:r>
+          </a:p>
+          <a:p>
+            <a:endParaRPr lang="en-US" dirty="0"/>
+          </a:p>
+        </p:txBody>
+      </p:sp>
+      <p:sp>
+        <p:nvSpPr>
+          <p:cNvPr id="4" name="Slide Number Placeholder 3"/>
+          <p:cNvSpPr>
+            <a:spLocks noGrp="1"/>
+          </p:cNvSpPr>
+          <p:nvPr>
+            <p:ph type="sldNum" sz="quarter" idx="5"/>
+          </p:nvPr>
+        </p:nvSpPr>
+        <p:spPr/>
+        <p:txBody>
+          <a:bodyPr/>
+          <a:lstStyle/>
+          <a:p>
+            <a:fld id="{12BC5CD0-964A-412E-BAD3-D4ECB486B5E6}" type="slidenum">
+              <a:rPr lang="en-US" smtClean="0"/>
+              <a:t>7</a:t>
+            </a:fld>
+            <a:endParaRPr lang="en-US"/>
+          </a:p>
+        </p:txBody>
+      </p:sp>
+    </p:spTree>
+    <p:extLst>
+      <p:ext uri="{BB962C8B-B14F-4D97-AF65-F5344CB8AC3E}">
+        <p14:creationId xmlns:p14="http://schemas.microsoft.com/office/powerpoint/2010/main" val="361840026"/>
+      </p:ext>
+    </p:extLst>
+  </p:cSld>
+  <p:clrMapOvr>
+    <a:masterClrMapping/>
+  </p:clrMapOvr>
+</p:notes>
+</file>
+
+<file path=ppt/notesSlides/notesSlide8.xml><?xml version="1.0" encoding="utf-8"?>
+<p:notes xmlns:a="http://schemas.openxmlformats.org/drawingml/2006/main" xmlns:r="http://schemas.openxmlformats.org/officeDocument/2006/relationships" xmlns:p="http://schemas.openxmlformats.org/presentationml/2006/main">
+  <p:cSld>
+    <p:spTree>
+      <p:nvGrpSpPr>
+        <p:cNvPr id="1" name=""/>
+        <p:cNvGrpSpPr/>
+        <p:nvPr/>
+      </p:nvGrpSpPr>
+      <p:grpSpPr>
+        <a:xfrm>
+          <a:off x="0" y="0"/>
+          <a:ext cx="0" cy="0"/>
+          <a:chOff x="0" y="0"/>
+          <a:chExt cx="0" cy="0"/>
+        </a:xfrm>
+      </p:grpSpPr>
+      <p:sp>
+        <p:nvSpPr>
+          <p:cNvPr id="2" name="Slide Image Placeholder 1"/>
+          <p:cNvSpPr>
+            <a:spLocks noGrp="1" noRot="1" noChangeAspect="1"/>
+          </p:cNvSpPr>
+          <p:nvPr>
+            <p:ph type="sldImg"/>
+          </p:nvPr>
+        </p:nvSpPr>
+        <p:spPr/>
+      </p:sp>
+      <p:sp>
+        <p:nvSpPr>
+          <p:cNvPr id="3" name="Notes Placeholder 2"/>
+          <p:cNvSpPr>
+            <a:spLocks noGrp="1"/>
+          </p:cNvSpPr>
+          <p:nvPr>
+            <p:ph type="body" idx="1"/>
+          </p:nvPr>
+        </p:nvSpPr>
+        <p:spPr/>
+        <p:txBody>
+          <a:bodyPr/>
+          <a:lstStyle/>
+          <a:p>
+            <a:endParaRPr lang="en-US"/>
+          </a:p>
+        </p:txBody>
+      </p:sp>
+      <p:sp>
+        <p:nvSpPr>
+          <p:cNvPr id="4" name="Slide Number Placeholder 3"/>
+          <p:cNvSpPr>
+            <a:spLocks noGrp="1"/>
+          </p:cNvSpPr>
+          <p:nvPr>
+            <p:ph type="sldNum" sz="quarter" idx="5"/>
+          </p:nvPr>
+        </p:nvSpPr>
+        <p:spPr/>
+        <p:txBody>
+          <a:bodyPr/>
+          <a:lstStyle/>
+          <a:p>
+            <a:fld id="{12BC5CD0-964A-412E-BAD3-D4ECB486B5E6}" type="slidenum">
+              <a:rPr lang="en-US" smtClean="0"/>
+              <a:t>8</a:t>
+            </a:fld>
+            <a:endParaRPr lang="en-US"/>
+          </a:p>
+        </p:txBody>
+      </p:sp>
+    </p:spTree>
+    <p:extLst>
+      <p:ext uri="{BB962C8B-B14F-4D97-AF65-F5344CB8AC3E}">
+        <p14:creationId xmlns:p14="http://schemas.microsoft.com/office/powerpoint/2010/main" val="1148380638"/>
+      </p:ext>
+    </p:extLst>
+  </p:cSld>
+  <p:clrMapOvr>
+    <a:masterClrMapping/>
+  </p:clrMapOvr>
+</p:notes>
+</file>
+
+<file path=ppt/notesSlides/notesSlide9.xml><?xml version="1.0" encoding="utf-8"?>
+<p:notes xmlns:a="http://schemas.openxmlformats.org/drawingml/2006/main" xmlns:r="http://schemas.openxmlformats.org/officeDocument/2006/relationships" xmlns:p="http://schemas.openxmlformats.org/presentationml/2006/main">
+  <p:cSld>
+    <p:spTree>
+      <p:nvGrpSpPr>
+        <p:cNvPr id="1" name=""/>
+        <p:cNvGrpSpPr/>
+        <p:nvPr/>
+      </p:nvGrpSpPr>
+      <p:grpSpPr>
+        <a:xfrm>
+          <a:off x="0" y="0"/>
+          <a:ext cx="0" cy="0"/>
+          <a:chOff x="0" y="0"/>
+          <a:chExt cx="0" cy="0"/>
+        </a:xfrm>
+      </p:grpSpPr>
+      <p:sp>
+        <p:nvSpPr>
+          <p:cNvPr id="2" name="Slide Image Placeholder 1"/>
+          <p:cNvSpPr>
+            <a:spLocks noGrp="1" noRot="1" noChangeAspect="1"/>
+          </p:cNvSpPr>
+          <p:nvPr>
+            <p:ph type="sldImg"/>
+          </p:nvPr>
+        </p:nvSpPr>
+        <p:spPr/>
+      </p:sp>
+      <p:sp>
+        <p:nvSpPr>
+          <p:cNvPr id="3" name="Notes Placeholder 2"/>
+          <p:cNvSpPr>
+            <a:spLocks noGrp="1"/>
+          </p:cNvSpPr>
+          <p:nvPr>
+            <p:ph type="body" idx="1"/>
+          </p:nvPr>
+        </p:nvSpPr>
+        <p:spPr/>
+        <p:txBody>
+          <a:bodyPr/>
+          <a:lstStyle/>
+          <a:p>
+            <a:endParaRPr lang="en-US"/>
+          </a:p>
+        </p:txBody>
+      </p:sp>
+      <p:sp>
+        <p:nvSpPr>
+          <p:cNvPr id="4" name="Slide Number Placeholder 3"/>
+          <p:cNvSpPr>
+            <a:spLocks noGrp="1"/>
+          </p:cNvSpPr>
+          <p:nvPr>
+            <p:ph type="sldNum" sz="quarter" idx="5"/>
+          </p:nvPr>
+        </p:nvSpPr>
+        <p:spPr/>
+        <p:txBody>
+          <a:bodyPr/>
+          <a:lstStyle/>
+          <a:p>
+            <a:fld id="{12BC5CD0-964A-412E-BAD3-D4ECB486B5E6}" type="slidenum">
+              <a:rPr lang="en-US" smtClean="0"/>
+              <a:t>9</a:t>
+            </a:fld>
+            <a:endParaRPr lang="en-US"/>
+          </a:p>
+        </p:txBody>
+      </p:sp>
+    </p:spTree>
+    <p:extLst>
+      <p:ext uri="{BB962C8B-B14F-4D97-AF65-F5344CB8AC3E}">
+        <p14:creationId xmlns:p14="http://schemas.microsoft.com/office/powerpoint/2010/main" val="4079186252"/>
+      </p:ext>
+    </p:extLst>
+  </p:cSld>
+  <p:clrMapOvr>
+    <a:masterClrMapping/>
+  </p:clrMapOvr>
+</p:notes>
+</file>
+
 <file path=ppt/slideLayouts/slideLayout1.xml><?xml version="1.0" encoding="utf-8"?>
 <p:sldLayout xmlns:a="http://schemas.openxmlformats.org/drawingml/2006/main" xmlns:r="http://schemas.openxmlformats.org/officeDocument/2006/relationships" xmlns:p="http://schemas.openxmlformats.org/presentationml/2006/main" type="title" preserve="1">
   <p:cSld name="Title Slide">
@@ -313,7 +5820,7 @@
           <a:p>
             <a:fld id="{5BCAD085-E8A6-8845-BD4E-CB4CCA059FC4}" type="datetimeFigureOut">
               <a:rPr lang="en-US" smtClean="0"/>
-              <a:t>7/2/2026</a:t>
+              <a:t>7/8/2026</a:t>
             </a:fld>
             <a:endParaRPr lang="en-US"/>
           </a:p>
@@ -481,7 +5988,7 @@
           <a:p>
             <a:fld id="{5BCAD085-E8A6-8845-BD4E-CB4CCA059FC4}" type="datetimeFigureOut">
               <a:rPr lang="en-US" smtClean="0"/>
-              <a:t>7/2/2026</a:t>
+              <a:t>7/8/2026</a:t>
             </a:fld>
             <a:endParaRPr lang="en-US"/>
           </a:p>
@@ -659,7 +6166,7 @@
           <a:p>
             <a:fld id="{5BCAD085-E8A6-8845-BD4E-CB4CCA059FC4}" type="datetimeFigureOut">
               <a:rPr lang="en-US" smtClean="0"/>
-              <a:t>7/2/2026</a:t>
+              <a:t>7/8/2026</a:t>
             </a:fld>
             <a:endParaRPr lang="en-US"/>
           </a:p>
@@ -827,7 +6334,7 @@
           <a:p>
             <a:fld id="{5BCAD085-E8A6-8845-BD4E-CB4CCA059FC4}" type="datetimeFigureOut">
               <a:rPr lang="en-US" smtClean="0"/>
-              <a:t>7/2/2026</a:t>
+              <a:t>7/8/2026</a:t>
             </a:fld>
             <a:endParaRPr lang="en-US"/>
           </a:p>
@@ -1072,7 +6579,7 @@
           <a:p>
             <a:fld id="{5BCAD085-E8A6-8845-BD4E-CB4CCA059FC4}" type="datetimeFigureOut">
               <a:rPr lang="en-US" smtClean="0"/>
-              <a:t>7/2/2026</a:t>
+              <a:t>7/8/2026</a:t>
             </a:fld>
             <a:endParaRPr lang="en-US"/>
           </a:p>
@@ -1357,7 +6864,7 @@
           <a:p>
             <a:fld id="{5BCAD085-E8A6-8845-BD4E-CB4CCA059FC4}" type="datetimeFigureOut">
               <a:rPr lang="en-US" smtClean="0"/>
-              <a:t>7/2/2026</a:t>
+              <a:t>7/8/2026</a:t>
             </a:fld>
             <a:endParaRPr lang="en-US"/>
           </a:p>
@@ -1776,7 +7283,7 @@
           <a:p>
             <a:fld id="{5BCAD085-E8A6-8845-BD4E-CB4CCA059FC4}" type="datetimeFigureOut">
               <a:rPr lang="en-US" smtClean="0"/>
-              <a:t>7/2/2026</a:t>
+              <a:t>7/8/2026</a:t>
             </a:fld>
             <a:endParaRPr lang="en-US"/>
           </a:p>
@@ -1893,7 +7400,7 @@
           <a:p>
             <a:fld id="{5BCAD085-E8A6-8845-BD4E-CB4CCA059FC4}" type="datetimeFigureOut">
               <a:rPr lang="en-US" smtClean="0"/>
-              <a:t>7/2/2026</a:t>
+              <a:t>7/8/2026</a:t>
             </a:fld>
             <a:endParaRPr lang="en-US"/>
           </a:p>
@@ -1988,7 +7495,7 @@
           <a:p>
             <a:fld id="{5BCAD085-E8A6-8845-BD4E-CB4CCA059FC4}" type="datetimeFigureOut">
               <a:rPr lang="en-US" smtClean="0"/>
-              <a:t>7/2/2026</a:t>
+              <a:t>7/8/2026</a:t>
             </a:fld>
             <a:endParaRPr lang="en-US"/>
           </a:p>
@@ -2263,7 +7770,7 @@
           <a:p>
             <a:fld id="{5BCAD085-E8A6-8845-BD4E-CB4CCA059FC4}" type="datetimeFigureOut">
               <a:rPr lang="en-US" smtClean="0"/>
-              <a:t>7/2/2026</a:t>
+              <a:t>7/8/2026</a:t>
             </a:fld>
             <a:endParaRPr lang="en-US"/>
           </a:p>
@@ -2515,7 +8022,7 @@
           <a:p>
             <a:fld id="{5BCAD085-E8A6-8845-BD4E-CB4CCA059FC4}" type="datetimeFigureOut">
               <a:rPr lang="en-US" smtClean="0"/>
-              <a:t>7/2/2026</a:t>
+              <a:t>7/8/2026</a:t>
             </a:fld>
             <a:endParaRPr lang="en-US"/>
           </a:p>
@@ -2726,7 +8233,7 @@
           <a:p>
             <a:fld id="{5BCAD085-E8A6-8845-BD4E-CB4CCA059FC4}" type="datetimeFigureOut">
               <a:rPr lang="en-US" smtClean="0"/>
-              <a:t>7/2/2026</a:t>
+              <a:t>7/8/2026</a:t>
             </a:fld>
             <a:endParaRPr lang="en-US"/>
           </a:p>
@@ -3162,7 +8669,7 @@
           <p:nvPr/>
         </p:nvPicPr>
         <p:blipFill>
-          <a:blip r:embed="rId2"/>
+          <a:blip r:embed="rId3"/>
           <a:stretch>
             <a:fillRect/>
           </a:stretch>
@@ -3295,12 +8802,16 @@
               </a:defRPr>
             </a:pPr>
             <a:r>
-              <a:rPr dirty="0" err="1"/>
-              <a:t>Máster</a:t>
-            </a:r>
-            <a:r>
               <a:rPr dirty="0"/>
-              <a:t> Desarrollo con IA — BIG School</a:t>
+              <a:t>M</a:t>
+            </a:r>
+            <a:r>
+              <a:rPr lang="en-US" dirty="0"/>
+              <a:t>as</a:t>
+            </a:r>
+            <a:r>
+              <a:rPr dirty="0"/>
+              <a:t>ter Desarrollo con IA — BIG School</a:t>
             </a:r>
           </a:p>
           <a:p>
@@ -4461,7 +9972,7 @@
           <p:nvPr/>
         </p:nvPicPr>
         <p:blipFill>
-          <a:blip r:embed="rId2"/>
+          <a:blip r:embed="rId3"/>
           <a:stretch>
             <a:fillRect/>
           </a:stretch>
@@ -6323,7 +11834,7 @@
           <p:nvPr/>
         </p:nvPicPr>
         <p:blipFill>
-          <a:blip r:embed="rId2"/>
+          <a:blip r:embed="rId3"/>
           <a:stretch>
             <a:fillRect/>
           </a:stretch>
@@ -6714,7 +12225,7 @@
           <p:nvPr/>
         </p:nvPicPr>
         <p:blipFill>
-          <a:blip r:embed="rId2"/>
+          <a:blip r:embed="rId3"/>
           <a:stretch>
             <a:fillRect/>
           </a:stretch>
@@ -6738,7 +12249,7 @@
           <p:nvPr/>
         </p:nvPicPr>
         <p:blipFill>
-          <a:blip r:embed="rId3"/>
+          <a:blip r:embed="rId4"/>
           <a:stretch>
             <a:fillRect/>
           </a:stretch>
@@ -6762,7 +12273,7 @@
           <p:nvPr/>
         </p:nvPicPr>
         <p:blipFill>
-          <a:blip r:embed="rId4"/>
+          <a:blip r:embed="rId5"/>
           <a:stretch>
             <a:fillRect/>
           </a:stretch>
@@ -6786,7 +12297,7 @@
           <p:nvPr/>
         </p:nvPicPr>
         <p:blipFill>
-          <a:blip r:embed="rId5"/>
+          <a:blip r:embed="rId6"/>
           <a:stretch>
             <a:fillRect/>
           </a:stretch>
@@ -7163,4 +12674,319 @@
   </a:objectDefaults>
   <a:extraClrSchemeLst/>
 </a:theme>
+</file>
+
+<file path=ppt/theme/theme2.xml><?xml version="1.0" encoding="utf-8"?>
+<a:theme xmlns:a="http://schemas.openxmlformats.org/drawingml/2006/main" name="Office Theme">
+  <a:themeElements>
+    <a:clrScheme name="Office">
+      <a:dk1>
+        <a:sysClr val="windowText" lastClr="000000"/>
+      </a:dk1>
+      <a:lt1>
+        <a:sysClr val="window" lastClr="FFFFFF"/>
+      </a:lt1>
+      <a:dk2>
+        <a:srgbClr val="0E2841"/>
+      </a:dk2>
+      <a:lt2>
+        <a:srgbClr val="E8E8E8"/>
+      </a:lt2>
+      <a:accent1>
+        <a:srgbClr val="156082"/>
+      </a:accent1>
+      <a:accent2>
+        <a:srgbClr val="E97132"/>
+      </a:accent2>
+      <a:accent3>
+        <a:srgbClr val="196B24"/>
+      </a:accent3>
+      <a:accent4>
+        <a:srgbClr val="0F9ED5"/>
+      </a:accent4>
+      <a:accent5>
+        <a:srgbClr val="A02B93"/>
+      </a:accent5>
+      <a:accent6>
+        <a:srgbClr val="4EA72E"/>
+      </a:accent6>
+      <a:hlink>
+        <a:srgbClr val="467886"/>
+      </a:hlink>
+      <a:folHlink>
+        <a:srgbClr val="96607D"/>
+      </a:folHlink>
+    </a:clrScheme>
+    <a:fontScheme name="Office">
+      <a:majorFont>
+        <a:latin typeface="Aptos Display" panose="02110004020202020204"/>
+        <a:ea typeface=""/>
+        <a:cs typeface=""/>
+        <a:font script="Jpan" typeface="游ゴシック Light"/>
+        <a:font script="Hang" typeface="맑은 고딕"/>
+        <a:font script="Hans" typeface="等线 Light"/>
+        <a:font script="Hant" typeface="新細明體"/>
+        <a:font script="Arab" typeface="Times New Roman"/>
+        <a:font script="Hebr" typeface="Times New Roman"/>
+        <a:font script="Thai" typeface="Angsana New"/>
+        <a:font script="Ethi" typeface="Nyala"/>
+        <a:font script="Beng" typeface="Vrinda"/>
+        <a:font script="Gujr" typeface="Shruti"/>
+        <a:font script="Khmr" typeface="MoolBoran"/>
+        <a:font script="Knda" typeface="Tunga"/>
+        <a:font script="Guru" typeface="Raavi"/>
+        <a:font script="Cans" typeface="Euphemia"/>
+        <a:font script="Cher" typeface="Plantagenet Cherokee"/>
+        <a:font script="Yiii" typeface="Microsoft Yi Baiti"/>
+        <a:font script="Tibt" typeface="Microsoft Himalaya"/>
+        <a:font script="Thaa" typeface="MV Boli"/>
+        <a:font script="Deva" typeface="Mangal"/>
+        <a:font script="Telu" typeface="Gautami"/>
+        <a:font script="Taml" typeface="Latha"/>
+        <a:font script="Syrc" typeface="Estrangelo Edessa"/>
+        <a:font script="Orya" typeface="Kalinga"/>
+        <a:font script="Mlym" typeface="Kartika"/>
+        <a:font script="Laoo" typeface="DokChampa"/>
+        <a:font script="Sinh" typeface="Iskoola Pota"/>
+        <a:font script="Mong" typeface="Mongolian Baiti"/>
+        <a:font script="Viet" typeface="Times New Roman"/>
+        <a:font script="Uigh" typeface="Microsoft Uighur"/>
+        <a:font script="Geor" typeface="Sylfaen"/>
+        <a:font script="Armn" typeface="Arial"/>
+        <a:font script="Bugi" typeface="Leelawadee UI"/>
+        <a:font script="Bopo" typeface="Microsoft JhengHei"/>
+        <a:font script="Java" typeface="Javanese Text"/>
+        <a:font script="Lisu" typeface="Segoe UI"/>
+        <a:font script="Mymr" typeface="Myanmar Text"/>
+        <a:font script="Nkoo" typeface="Ebrima"/>
+        <a:font script="Olck" typeface="Nirmala UI"/>
+        <a:font script="Osma" typeface="Ebrima"/>
+        <a:font script="Phag" typeface="Phagspa"/>
+        <a:font script="Syrn" typeface="Estrangelo Edessa"/>
+        <a:font script="Syrj" typeface="Estrangelo Edessa"/>
+        <a:font script="Syre" typeface="Estrangelo Edessa"/>
+        <a:font script="Sora" typeface="Nirmala UI"/>
+        <a:font script="Tale" typeface="Microsoft Tai Le"/>
+        <a:font script="Talu" typeface="Microsoft New Tai Lue"/>
+        <a:font script="Tfng" typeface="Ebrima"/>
+      </a:majorFont>
+      <a:minorFont>
+        <a:latin typeface="Aptos" panose="02110004020202020204"/>
+        <a:ea typeface=""/>
+        <a:cs typeface=""/>
+        <a:font script="Jpan" typeface="游ゴシック"/>
+        <a:font script="Hang" typeface="맑은 고딕"/>
+        <a:font script="Hans" typeface="等线"/>
+        <a:font script="Hant" typeface="新細明體"/>
+        <a:font script="Arab" typeface="Arial"/>
+        <a:font script="Hebr" typeface="Arial"/>
+        <a:font script="Thai" typeface="Cordia New"/>
+        <a:font script="Ethi" typeface="Nyala"/>
+        <a:font script="Beng" typeface="Vrinda"/>
+        <a:font script="Gujr" typeface="Shruti"/>
+        <a:font script="Khmr" typeface="DaunPenh"/>
+        <a:font script="Knda" typeface="Tunga"/>
+        <a:font script="Guru" typeface="Raavi"/>
+        <a:font script="Cans" typeface="Euphemia"/>
+        <a:font script="Cher" typeface="Plantagenet Cherokee"/>
+        <a:font script="Yiii" typeface="Microsoft Yi Baiti"/>
+        <a:font script="Tibt" typeface="Microsoft Himalaya"/>
+        <a:font script="Thaa" typeface="MV Boli"/>
+        <a:font script="Deva" typeface="Mangal"/>
+        <a:font script="Telu" typeface="Gautami"/>
+        <a:font script="Taml" typeface="Latha"/>
+        <a:font script="Syrc" typeface="Estrangelo Edessa"/>
+        <a:font script="Orya" typeface="Kalinga"/>
+        <a:font script="Mlym" typeface="Kartika"/>
+        <a:font script="Laoo" typeface="DokChampa"/>
+        <a:font script="Sinh" typeface="Iskoola Pota"/>
+        <a:font script="Mong" typeface="Mongolian Baiti"/>
+        <a:font script="Viet" typeface="Arial"/>
+        <a:font script="Uigh" typeface="Microsoft Uighur"/>
+        <a:font script="Geor" typeface="Sylfaen"/>
+        <a:font script="Armn" typeface="Arial"/>
+        <a:font script="Bugi" typeface="Leelawadee UI"/>
+        <a:font script="Bopo" typeface="Microsoft JhengHei"/>
+        <a:font script="Java" typeface="Javanese Text"/>
+        <a:font script="Lisu" typeface="Segoe UI"/>
+        <a:font script="Mymr" typeface="Myanmar Text"/>
+        <a:font script="Nkoo" typeface="Ebrima"/>
+        <a:font script="Olck" typeface="Nirmala UI"/>
+        <a:font script="Osma" typeface="Ebrima"/>
+        <a:font script="Phag" typeface="Phagspa"/>
+        <a:font script="Syrn" typeface="Estrangelo Edessa"/>
+        <a:font script="Syrj" typeface="Estrangelo Edessa"/>
+        <a:font script="Syre" typeface="Estrangelo Edessa"/>
+        <a:font script="Sora" typeface="Nirmala UI"/>
+        <a:font script="Tale" typeface="Microsoft Tai Le"/>
+        <a:font script="Talu" typeface="Microsoft New Tai Lue"/>
+        <a:font script="Tfng" typeface="Ebrima"/>
+      </a:minorFont>
+    </a:fontScheme>
+    <a:fmtScheme name="Office">
+      <a:fillStyleLst>
+        <a:solidFill>
+          <a:schemeClr val="phClr"/>
+        </a:solidFill>
+        <a:gradFill rotWithShape="1">
+          <a:gsLst>
+            <a:gs pos="0">
+              <a:schemeClr val="phClr">
+                <a:lumMod val="110000"/>
+                <a:satMod val="105000"/>
+                <a:tint val="67000"/>
+              </a:schemeClr>
+            </a:gs>
+            <a:gs pos="50000">
+              <a:schemeClr val="phClr">
+                <a:lumMod val="105000"/>
+                <a:satMod val="103000"/>
+                <a:tint val="73000"/>
+              </a:schemeClr>
+            </a:gs>
+            <a:gs pos="100000">
+              <a:schemeClr val="phClr">
+                <a:lumMod val="105000"/>
+                <a:satMod val="109000"/>
+                <a:tint val="81000"/>
+              </a:schemeClr>
+            </a:gs>
+          </a:gsLst>
+          <a:lin ang="5400000" scaled="0"/>
+        </a:gradFill>
+        <a:gradFill rotWithShape="1">
+          <a:gsLst>
+            <a:gs pos="0">
+              <a:schemeClr val="phClr">
+                <a:satMod val="103000"/>
+                <a:lumMod val="102000"/>
+                <a:tint val="94000"/>
+              </a:schemeClr>
+            </a:gs>
+            <a:gs pos="50000">
+              <a:schemeClr val="phClr">
+                <a:satMod val="110000"/>
+                <a:lumMod val="100000"/>
+                <a:shade val="100000"/>
+              </a:schemeClr>
+            </a:gs>
+            <a:gs pos="100000">
+              <a:schemeClr val="phClr">
+                <a:lumMod val="99000"/>
+                <a:satMod val="120000"/>
+                <a:shade val="78000"/>
+              </a:schemeClr>
+            </a:gs>
+          </a:gsLst>
+          <a:lin ang="5400000" scaled="0"/>
+        </a:gradFill>
+      </a:fillStyleLst>
+      <a:lnStyleLst>
+        <a:ln w="12700" cap="flat" cmpd="sng" algn="ctr">
+          <a:solidFill>
+            <a:schemeClr val="phClr"/>
+          </a:solidFill>
+          <a:prstDash val="solid"/>
+          <a:miter lim="800000"/>
+        </a:ln>
+        <a:ln w="19050" cap="flat" cmpd="sng" algn="ctr">
+          <a:solidFill>
+            <a:schemeClr val="phClr"/>
+          </a:solidFill>
+          <a:prstDash val="solid"/>
+          <a:miter lim="800000"/>
+        </a:ln>
+        <a:ln w="25400" cap="flat" cmpd="sng" algn="ctr">
+          <a:solidFill>
+            <a:schemeClr val="phClr"/>
+          </a:solidFill>
+          <a:prstDash val="solid"/>
+          <a:miter lim="800000"/>
+        </a:ln>
+      </a:lnStyleLst>
+      <a:effectStyleLst>
+        <a:effectStyle>
+          <a:effectLst/>
+        </a:effectStyle>
+        <a:effectStyle>
+          <a:effectLst/>
+        </a:effectStyle>
+        <a:effectStyle>
+          <a:effectLst>
+            <a:outerShdw blurRad="57150" dist="19050" dir="5400000" algn="ctr" rotWithShape="0">
+              <a:srgbClr val="000000">
+                <a:alpha val="63000"/>
+              </a:srgbClr>
+            </a:outerShdw>
+          </a:effectLst>
+        </a:effectStyle>
+      </a:effectStyleLst>
+      <a:bgFillStyleLst>
+        <a:solidFill>
+          <a:schemeClr val="phClr"/>
+        </a:solidFill>
+        <a:solidFill>
+          <a:schemeClr val="phClr">
+            <a:tint val="95000"/>
+            <a:satMod val="170000"/>
+          </a:schemeClr>
+        </a:solidFill>
+        <a:gradFill rotWithShape="1">
+          <a:gsLst>
+            <a:gs pos="0">
+              <a:schemeClr val="phClr">
+                <a:tint val="93000"/>
+                <a:satMod val="150000"/>
+                <a:shade val="98000"/>
+                <a:lumMod val="102000"/>
+              </a:schemeClr>
+            </a:gs>
+            <a:gs pos="50000">
+              <a:schemeClr val="phClr">
+                <a:tint val="98000"/>
+                <a:satMod val="130000"/>
+                <a:shade val="90000"/>
+                <a:lumMod val="103000"/>
+              </a:schemeClr>
+            </a:gs>
+            <a:gs pos="100000">
+              <a:schemeClr val="phClr">
+                <a:shade val="63000"/>
+                <a:satMod val="120000"/>
+              </a:schemeClr>
+            </a:gs>
+          </a:gsLst>
+          <a:lin ang="5400000" scaled="0"/>
+        </a:gradFill>
+      </a:bgFillStyleLst>
+    </a:fmtScheme>
+  </a:themeElements>
+  <a:objectDefaults>
+    <a:lnDef>
+      <a:spPr/>
+      <a:bodyPr/>
+      <a:lstStyle/>
+      <a:style>
+        <a:lnRef idx="2">
+          <a:schemeClr val="accent1"/>
+        </a:lnRef>
+        <a:fillRef idx="0">
+          <a:schemeClr val="accent1"/>
+        </a:fillRef>
+        <a:effectRef idx="1">
+          <a:schemeClr val="accent1"/>
+        </a:effectRef>
+        <a:fontRef idx="minor">
+          <a:schemeClr val="tx1"/>
+        </a:fontRef>
+      </a:style>
+    </a:lnDef>
+  </a:objectDefaults>
+  <a:extraClrSchemeLst/>
+  <a:extLst>
+    <a:ext uri="{05A4C25C-085E-4340-85A3-A5531E510DB2}">
+      <thm15:themeFamily xmlns:thm15="http://schemas.microsoft.com/office/thememl/2012/main" name="Office Theme" id="{2E142A2C-CD16-42D6-873A-C26D2A0506FA}" vid="{1BDDFF52-6CD6-40A5-AB3C-68EB2F1E4D0A}"/>
+    </a:ext>
+  </a:extLst>
+</a:theme>
 </file>